--- a/His Mercy is More-CH.pptx
+++ b/His Mercy is More-CH.pptx
@@ -7,19 +7,13 @@
   <p:sldIdLst>
     <p:sldId id="257" r:id="rId2"/>
     <p:sldId id="272" r:id="rId3"/>
-    <p:sldId id="260" r:id="rId4"/>
-    <p:sldId id="261" r:id="rId5"/>
-    <p:sldId id="259" r:id="rId6"/>
-    <p:sldId id="262" r:id="rId7"/>
-    <p:sldId id="263" r:id="rId8"/>
-    <p:sldId id="265" r:id="rId9"/>
-    <p:sldId id="264" r:id="rId10"/>
-    <p:sldId id="266" r:id="rId11"/>
-    <p:sldId id="267" r:id="rId12"/>
-    <p:sldId id="268" r:id="rId13"/>
-    <p:sldId id="271" r:id="rId14"/>
-    <p:sldId id="269" r:id="rId15"/>
-    <p:sldId id="270" r:id="rId16"/>
+    <p:sldId id="261" r:id="rId4"/>
+    <p:sldId id="259" r:id="rId5"/>
+    <p:sldId id="273" r:id="rId6"/>
+    <p:sldId id="265" r:id="rId7"/>
+    <p:sldId id="274" r:id="rId8"/>
+    <p:sldId id="268" r:id="rId9"/>
+    <p:sldId id="275" r:id="rId10"/>
   </p:sldIdLst>
   <p:sldSz cx="12192000" cy="6858000"/>
   <p:notesSz cx="6858000" cy="9144000"/>
@@ -273,7 +267,7 @@
           <a:p>
             <a:fld id="{E759A0DE-F190-5444-87AC-4719D5F20D15}" type="datetimeFigureOut">
               <a:rPr lang="en-US" smtClean="0"/>
-              <a:t>11/15/25</a:t>
+              <a:t>8/8/26</a:t>
             </a:fld>
             <a:endParaRPr lang="en-US"/>
           </a:p>
@@ -471,7 +465,7 @@
           <a:p>
             <a:fld id="{E759A0DE-F190-5444-87AC-4719D5F20D15}" type="datetimeFigureOut">
               <a:rPr lang="en-US" smtClean="0"/>
-              <a:t>11/15/25</a:t>
+              <a:t>8/8/26</a:t>
             </a:fld>
             <a:endParaRPr lang="en-US"/>
           </a:p>
@@ -679,7 +673,7 @@
           <a:p>
             <a:fld id="{E759A0DE-F190-5444-87AC-4719D5F20D15}" type="datetimeFigureOut">
               <a:rPr lang="en-US" smtClean="0"/>
-              <a:t>11/15/25</a:t>
+              <a:t>8/8/26</a:t>
             </a:fld>
             <a:endParaRPr lang="en-US"/>
           </a:p>
@@ -877,7 +871,7 @@
           <a:p>
             <a:fld id="{E759A0DE-F190-5444-87AC-4719D5F20D15}" type="datetimeFigureOut">
               <a:rPr lang="en-US" smtClean="0"/>
-              <a:t>11/15/25</a:t>
+              <a:t>8/8/26</a:t>
             </a:fld>
             <a:endParaRPr lang="en-US"/>
           </a:p>
@@ -1152,7 +1146,7 @@
           <a:p>
             <a:fld id="{E759A0DE-F190-5444-87AC-4719D5F20D15}" type="datetimeFigureOut">
               <a:rPr lang="en-US" smtClean="0"/>
-              <a:t>11/15/25</a:t>
+              <a:t>8/8/26</a:t>
             </a:fld>
             <a:endParaRPr lang="en-US"/>
           </a:p>
@@ -1417,7 +1411,7 @@
           <a:p>
             <a:fld id="{E759A0DE-F190-5444-87AC-4719D5F20D15}" type="datetimeFigureOut">
               <a:rPr lang="en-US" smtClean="0"/>
-              <a:t>11/15/25</a:t>
+              <a:t>8/8/26</a:t>
             </a:fld>
             <a:endParaRPr lang="en-US"/>
           </a:p>
@@ -1829,7 +1823,7 @@
           <a:p>
             <a:fld id="{E759A0DE-F190-5444-87AC-4719D5F20D15}" type="datetimeFigureOut">
               <a:rPr lang="en-US" smtClean="0"/>
-              <a:t>11/15/25</a:t>
+              <a:t>8/8/26</a:t>
             </a:fld>
             <a:endParaRPr lang="en-US"/>
           </a:p>
@@ -1970,7 +1964,7 @@
           <a:p>
             <a:fld id="{E759A0DE-F190-5444-87AC-4719D5F20D15}" type="datetimeFigureOut">
               <a:rPr lang="en-US" smtClean="0"/>
-              <a:t>11/15/25</a:t>
+              <a:t>8/8/26</a:t>
             </a:fld>
             <a:endParaRPr lang="en-US"/>
           </a:p>
@@ -2083,7 +2077,7 @@
           <a:p>
             <a:fld id="{E759A0DE-F190-5444-87AC-4719D5F20D15}" type="datetimeFigureOut">
               <a:rPr lang="en-US" smtClean="0"/>
-              <a:t>11/15/25</a:t>
+              <a:t>8/8/26</a:t>
             </a:fld>
             <a:endParaRPr lang="en-US"/>
           </a:p>
@@ -2394,7 +2388,7 @@
           <a:p>
             <a:fld id="{E759A0DE-F190-5444-87AC-4719D5F20D15}" type="datetimeFigureOut">
               <a:rPr lang="en-US" smtClean="0"/>
-              <a:t>11/15/25</a:t>
+              <a:t>8/8/26</a:t>
             </a:fld>
             <a:endParaRPr lang="en-US"/>
           </a:p>
@@ -2682,7 +2676,7 @@
           <a:p>
             <a:fld id="{E759A0DE-F190-5444-87AC-4719D5F20D15}" type="datetimeFigureOut">
               <a:rPr lang="en-US" smtClean="0"/>
-              <a:t>11/15/25</a:t>
+              <a:t>8/8/26</a:t>
             </a:fld>
             <a:endParaRPr lang="en-US"/>
           </a:p>
@@ -2923,7 +2917,7 @@
           <a:p>
             <a:fld id="{E759A0DE-F190-5444-87AC-4719D5F20D15}" type="datetimeFigureOut">
               <a:rPr lang="en-US" smtClean="0"/>
-              <a:t>11/15/25</a:t>
+              <a:t>8/8/26</a:t>
             </a:fld>
             <a:endParaRPr lang="en-US"/>
           </a:p>
@@ -3751,911 +3745,6 @@
 </p:sld>
 </file>
 
-<file path=ppt/slides/slide10.xml><?xml version="1.0" encoding="utf-8"?>
-<p:sld xmlns:a="http://schemas.openxmlformats.org/drawingml/2006/main" xmlns:r="http://schemas.openxmlformats.org/officeDocument/2006/relationships" xmlns:p="http://schemas.openxmlformats.org/presentationml/2006/main">
-  <p:cSld>
-    <p:bg>
-      <p:bgPr>
-        <a:solidFill>
-          <a:srgbClr val="7030A0"/>
-        </a:solidFill>
-        <a:effectLst/>
-      </p:bgPr>
-    </p:bg>
-    <p:spTree>
-      <p:nvGrpSpPr>
-        <p:cNvPr id="1" name="">
-          <a:extLst>
-            <a:ext uri="{FF2B5EF4-FFF2-40B4-BE49-F238E27FC236}">
-              <a16:creationId xmlns:a16="http://schemas.microsoft.com/office/drawing/2014/main" id="{2F06430C-F080-BAC0-6911-7773A1C75171}"/>
-            </a:ext>
-          </a:extLst>
-        </p:cNvPr>
-        <p:cNvGrpSpPr/>
-        <p:nvPr/>
-      </p:nvGrpSpPr>
-      <p:grpSpPr>
-        <a:xfrm>
-          <a:off x="0" y="0"/>
-          <a:ext cx="0" cy="0"/>
-          <a:chOff x="0" y="0"/>
-          <a:chExt cx="0" cy="0"/>
-        </a:xfrm>
-      </p:grpSpPr>
-      <p:sp>
-        <p:nvSpPr>
-          <p:cNvPr id="3" name="Subtitle 2">
-            <a:extLst>
-              <a:ext uri="{FF2B5EF4-FFF2-40B4-BE49-F238E27FC236}">
-                <a16:creationId xmlns:a16="http://schemas.microsoft.com/office/drawing/2014/main" id="{8329FF72-2542-4B42-F83E-6F9237349C20}"/>
-              </a:ext>
-            </a:extLst>
-          </p:cNvPr>
-          <p:cNvSpPr>
-            <a:spLocks noGrp="1"/>
-          </p:cNvSpPr>
-          <p:nvPr>
-            <p:ph type="subTitle" idx="1"/>
-          </p:nvPr>
-        </p:nvSpPr>
-        <p:spPr>
-          <a:xfrm>
-            <a:off x="682831" y="497702"/>
-            <a:ext cx="10826338" cy="5862596"/>
-          </a:xfrm>
-        </p:spPr>
-        <p:txBody>
-          <a:bodyPr>
-            <a:noAutofit/>
-          </a:bodyPr>
-          <a:lstStyle/>
-          <a:p>
-            <a:endParaRPr lang="en-US" sz="4400" dirty="0">
-              <a:solidFill>
-                <a:schemeClr val="bg1"/>
-              </a:solidFill>
-              <a:latin typeface="Avenir Medium" panose="02000503020000020003" pitchFamily="2" charset="0"/>
-              <a:ea typeface="Bodoni Ornaments" pitchFamily="2" charset="0"/>
-            </a:endParaRPr>
-          </a:p>
-          <a:p>
-            <a:r>
-              <a:rPr lang="en-US" sz="4400" dirty="0">
-                <a:solidFill>
-                  <a:schemeClr val="bg1"/>
-                </a:solidFill>
-                <a:latin typeface="Avenir Medium" panose="02000503020000020003" pitchFamily="2" charset="0"/>
-                <a:ea typeface="Bodoni Ornaments" pitchFamily="2" charset="0"/>
-              </a:rPr>
-              <a:t>Praise the Lord, </a:t>
-            </a:r>
-            <a:br>
-              <a:rPr lang="en-US" sz="4400" dirty="0">
-                <a:solidFill>
-                  <a:schemeClr val="bg1"/>
-                </a:solidFill>
-                <a:latin typeface="Avenir Medium" panose="02000503020000020003" pitchFamily="2" charset="0"/>
-                <a:ea typeface="Bodoni Ornaments" pitchFamily="2" charset="0"/>
-              </a:rPr>
-            </a:br>
-            <a:endParaRPr lang="en-US" sz="4400" dirty="0">
-              <a:solidFill>
-                <a:schemeClr val="bg1"/>
-              </a:solidFill>
-              <a:latin typeface="Avenir Medium" panose="02000503020000020003" pitchFamily="2" charset="0"/>
-              <a:ea typeface="Bodoni Ornaments" pitchFamily="2" charset="0"/>
-            </a:endParaRPr>
-          </a:p>
-          <a:p>
-            <a:r>
-              <a:rPr lang="en-US" sz="4400" dirty="0">
-                <a:solidFill>
-                  <a:schemeClr val="bg1"/>
-                </a:solidFill>
-                <a:latin typeface="Avenir Medium" panose="02000503020000020003" pitchFamily="2" charset="0"/>
-                <a:ea typeface="Bodoni Ornaments" pitchFamily="2" charset="0"/>
-              </a:rPr>
-              <a:t>His mercy is more</a:t>
-            </a:r>
-          </a:p>
-          <a:p>
-            <a:endParaRPr lang="en-US" sz="4400" dirty="0">
-              <a:solidFill>
-                <a:schemeClr val="bg1"/>
-              </a:solidFill>
-              <a:latin typeface="Avenir Medium" panose="02000503020000020003" pitchFamily="2" charset="0"/>
-              <a:ea typeface="Bodoni Ornaments" pitchFamily="2" charset="0"/>
-            </a:endParaRPr>
-          </a:p>
-          <a:p>
-            <a:r>
-              <a:rPr lang="en-US" sz="4400" dirty="0">
-                <a:solidFill>
-                  <a:schemeClr val="bg1"/>
-                </a:solidFill>
-                <a:latin typeface="Avenir Medium" panose="02000503020000020003" pitchFamily="2" charset="0"/>
-                <a:ea typeface="Bodoni Ornaments" pitchFamily="2" charset="0"/>
-              </a:rPr>
-              <a:t>Stronger than darkness, </a:t>
-            </a:r>
-          </a:p>
-          <a:p>
-            <a:endParaRPr lang="en-US" sz="4400" dirty="0">
-              <a:solidFill>
-                <a:schemeClr val="bg1"/>
-              </a:solidFill>
-              <a:latin typeface="Avenir Medium" panose="02000503020000020003" pitchFamily="2" charset="0"/>
-              <a:ea typeface="Bodoni Ornaments" pitchFamily="2" charset="0"/>
-            </a:endParaRPr>
-          </a:p>
-          <a:p>
-            <a:r>
-              <a:rPr lang="en-US" sz="4400" dirty="0">
-                <a:solidFill>
-                  <a:schemeClr val="bg1"/>
-                </a:solidFill>
-                <a:latin typeface="Avenir Medium" panose="02000503020000020003" pitchFamily="2" charset="0"/>
-                <a:ea typeface="Bodoni Ornaments" pitchFamily="2" charset="0"/>
-              </a:rPr>
-              <a:t>new every morn</a:t>
-            </a:r>
-          </a:p>
-        </p:txBody>
-      </p:sp>
-    </p:spTree>
-    <p:extLst>
-      <p:ext uri="{BB962C8B-B14F-4D97-AF65-F5344CB8AC3E}">
-        <p14:creationId xmlns:p14="http://schemas.microsoft.com/office/powerpoint/2010/main" val="2300250334"/>
-      </p:ext>
-    </p:extLst>
-  </p:cSld>
-  <p:clrMapOvr>
-    <a:masterClrMapping/>
-  </p:clrMapOvr>
-</p:sld>
-</file>
-
-<file path=ppt/slides/slide11.xml><?xml version="1.0" encoding="utf-8"?>
-<p:sld xmlns:a="http://schemas.openxmlformats.org/drawingml/2006/main" xmlns:r="http://schemas.openxmlformats.org/officeDocument/2006/relationships" xmlns:p="http://schemas.openxmlformats.org/presentationml/2006/main">
-  <p:cSld>
-    <p:bg>
-      <p:bgPr>
-        <a:solidFill>
-          <a:srgbClr val="7030A0"/>
-        </a:solidFill>
-        <a:effectLst/>
-      </p:bgPr>
-    </p:bg>
-    <p:spTree>
-      <p:nvGrpSpPr>
-        <p:cNvPr id="1" name="">
-          <a:extLst>
-            <a:ext uri="{FF2B5EF4-FFF2-40B4-BE49-F238E27FC236}">
-              <a16:creationId xmlns:a16="http://schemas.microsoft.com/office/drawing/2014/main" id="{AC357511-55CF-9AF6-63C4-CA8AF74ACA99}"/>
-            </a:ext>
-          </a:extLst>
-        </p:cNvPr>
-        <p:cNvGrpSpPr/>
-        <p:nvPr/>
-      </p:nvGrpSpPr>
-      <p:grpSpPr>
-        <a:xfrm>
-          <a:off x="0" y="0"/>
-          <a:ext cx="0" cy="0"/>
-          <a:chOff x="0" y="0"/>
-          <a:chExt cx="0" cy="0"/>
-        </a:xfrm>
-      </p:grpSpPr>
-      <p:sp>
-        <p:nvSpPr>
-          <p:cNvPr id="3" name="Subtitle 2">
-            <a:extLst>
-              <a:ext uri="{FF2B5EF4-FFF2-40B4-BE49-F238E27FC236}">
-                <a16:creationId xmlns:a16="http://schemas.microsoft.com/office/drawing/2014/main" id="{5A40B855-4967-09E1-361A-6BD31C1FA5EB}"/>
-              </a:ext>
-            </a:extLst>
-          </p:cNvPr>
-          <p:cNvSpPr>
-            <a:spLocks noGrp="1"/>
-          </p:cNvSpPr>
-          <p:nvPr>
-            <p:ph type="subTitle" idx="1"/>
-          </p:nvPr>
-        </p:nvSpPr>
-        <p:spPr>
-          <a:xfrm>
-            <a:off x="682831" y="497702"/>
-            <a:ext cx="10826338" cy="5862596"/>
-          </a:xfrm>
-        </p:spPr>
-        <p:txBody>
-          <a:bodyPr>
-            <a:noAutofit/>
-          </a:bodyPr>
-          <a:lstStyle/>
-          <a:p>
-            <a:endParaRPr lang="en-US" sz="4400" dirty="0">
-              <a:solidFill>
-                <a:schemeClr val="bg1"/>
-              </a:solidFill>
-              <a:latin typeface="Avenir Medium" panose="02000503020000020003" pitchFamily="2" charset="0"/>
-              <a:ea typeface="Bodoni Ornaments" pitchFamily="2" charset="0"/>
-            </a:endParaRPr>
-          </a:p>
-          <a:p>
-            <a:r>
-              <a:rPr lang="en-US" sz="4400" dirty="0">
-                <a:solidFill>
-                  <a:schemeClr val="bg1"/>
-                </a:solidFill>
-                <a:latin typeface="Avenir Medium" panose="02000503020000020003" pitchFamily="2" charset="0"/>
-                <a:ea typeface="Bodoni Ornaments" pitchFamily="2" charset="0"/>
-              </a:rPr>
-              <a:t>Our sins they are many, </a:t>
-            </a:r>
-          </a:p>
-          <a:p>
-            <a:endParaRPr lang="en-US" sz="4400" dirty="0">
-              <a:solidFill>
-                <a:schemeClr val="bg1"/>
-              </a:solidFill>
-              <a:latin typeface="Avenir Medium" panose="02000503020000020003" pitchFamily="2" charset="0"/>
-              <a:ea typeface="Bodoni Ornaments" pitchFamily="2" charset="0"/>
-            </a:endParaRPr>
-          </a:p>
-          <a:p>
-            <a:r>
-              <a:rPr lang="en-US" sz="4400" dirty="0">
-                <a:solidFill>
-                  <a:schemeClr val="bg1"/>
-                </a:solidFill>
-                <a:latin typeface="Avenir Medium" panose="02000503020000020003" pitchFamily="2" charset="0"/>
-                <a:ea typeface="Bodoni Ornaments" pitchFamily="2" charset="0"/>
-              </a:rPr>
-              <a:t>His mercy is more</a:t>
-            </a:r>
-          </a:p>
-        </p:txBody>
-      </p:sp>
-    </p:spTree>
-    <p:extLst>
-      <p:ext uri="{BB962C8B-B14F-4D97-AF65-F5344CB8AC3E}">
-        <p14:creationId xmlns:p14="http://schemas.microsoft.com/office/powerpoint/2010/main" val="3493123151"/>
-      </p:ext>
-    </p:extLst>
-  </p:cSld>
-  <p:clrMapOvr>
-    <a:masterClrMapping/>
-  </p:clrMapOvr>
-</p:sld>
-</file>
-
-<file path=ppt/slides/slide12.xml><?xml version="1.0" encoding="utf-8"?>
-<p:sld xmlns:a="http://schemas.openxmlformats.org/drawingml/2006/main" xmlns:r="http://schemas.openxmlformats.org/officeDocument/2006/relationships" xmlns:p="http://schemas.openxmlformats.org/presentationml/2006/main">
-  <p:cSld>
-    <p:bg>
-      <p:bgPr>
-        <a:solidFill>
-          <a:schemeClr val="accent1"/>
-        </a:solidFill>
-        <a:effectLst/>
-      </p:bgPr>
-    </p:bg>
-    <p:spTree>
-      <p:nvGrpSpPr>
-        <p:cNvPr id="1" name="">
-          <a:extLst>
-            <a:ext uri="{FF2B5EF4-FFF2-40B4-BE49-F238E27FC236}">
-              <a16:creationId xmlns:a16="http://schemas.microsoft.com/office/drawing/2014/main" id="{8DB28804-0296-2F6C-62C2-18A0239C9107}"/>
-            </a:ext>
-          </a:extLst>
-        </p:cNvPr>
-        <p:cNvGrpSpPr/>
-        <p:nvPr/>
-      </p:nvGrpSpPr>
-      <p:grpSpPr>
-        <a:xfrm>
-          <a:off x="0" y="0"/>
-          <a:ext cx="0" cy="0"/>
-          <a:chOff x="0" y="0"/>
-          <a:chExt cx="0" cy="0"/>
-        </a:xfrm>
-      </p:grpSpPr>
-      <p:sp>
-        <p:nvSpPr>
-          <p:cNvPr id="3" name="Subtitle 2">
-            <a:extLst>
-              <a:ext uri="{FF2B5EF4-FFF2-40B4-BE49-F238E27FC236}">
-                <a16:creationId xmlns:a16="http://schemas.microsoft.com/office/drawing/2014/main" id="{5813D3C6-E285-880B-ACB9-52B26040EE65}"/>
-              </a:ext>
-            </a:extLst>
-          </p:cNvPr>
-          <p:cNvSpPr>
-            <a:spLocks noGrp="1"/>
-          </p:cNvSpPr>
-          <p:nvPr>
-            <p:ph type="subTitle" idx="1"/>
-          </p:nvPr>
-        </p:nvSpPr>
-        <p:spPr>
-          <a:xfrm>
-            <a:off x="682831" y="497702"/>
-            <a:ext cx="10826338" cy="5862596"/>
-          </a:xfrm>
-        </p:spPr>
-        <p:txBody>
-          <a:bodyPr>
-            <a:noAutofit/>
-          </a:bodyPr>
-          <a:lstStyle/>
-          <a:p>
-            <a:endParaRPr lang="en-US" sz="4400" dirty="0">
-              <a:solidFill>
-                <a:schemeClr val="bg1"/>
-              </a:solidFill>
-              <a:latin typeface="Avenir Medium" panose="02000503020000020003" pitchFamily="2" charset="0"/>
-              <a:ea typeface="Bodoni Ornaments" pitchFamily="2" charset="0"/>
-            </a:endParaRPr>
-          </a:p>
-          <a:p>
-            <a:r>
-              <a:rPr lang="en-US" sz="4400" dirty="0">
-                <a:solidFill>
-                  <a:schemeClr val="bg1"/>
-                </a:solidFill>
-                <a:latin typeface="Avenir Medium" panose="02000503020000020003" pitchFamily="2" charset="0"/>
-                <a:ea typeface="Bodoni Ornaments" pitchFamily="2" charset="0"/>
-              </a:rPr>
-              <a:t>What riches of kindness </a:t>
-            </a:r>
-          </a:p>
-          <a:p>
-            <a:endParaRPr lang="en-US" sz="4400" dirty="0">
-              <a:solidFill>
-                <a:schemeClr val="bg1"/>
-              </a:solidFill>
-              <a:latin typeface="Avenir Medium" panose="02000503020000020003" pitchFamily="2" charset="0"/>
-              <a:ea typeface="Bodoni Ornaments" pitchFamily="2" charset="0"/>
-            </a:endParaRPr>
-          </a:p>
-          <a:p>
-            <a:r>
-              <a:rPr lang="en-US" sz="4400" dirty="0">
-                <a:solidFill>
-                  <a:schemeClr val="bg1"/>
-                </a:solidFill>
-                <a:latin typeface="Avenir Medium" panose="02000503020000020003" pitchFamily="2" charset="0"/>
-                <a:ea typeface="Bodoni Ornaments" pitchFamily="2" charset="0"/>
-              </a:rPr>
-              <a:t>He lavished on us</a:t>
-            </a:r>
-          </a:p>
-          <a:p>
-            <a:endParaRPr lang="en-US" sz="4400" dirty="0">
-              <a:solidFill>
-                <a:schemeClr val="bg1"/>
-              </a:solidFill>
-              <a:latin typeface="Avenir Medium" panose="02000503020000020003" pitchFamily="2" charset="0"/>
-              <a:ea typeface="Bodoni Ornaments" pitchFamily="2" charset="0"/>
-            </a:endParaRPr>
-          </a:p>
-          <a:p>
-            <a:r>
-              <a:rPr lang="en-US" sz="4400" dirty="0">
-                <a:solidFill>
-                  <a:schemeClr val="bg1"/>
-                </a:solidFill>
-                <a:latin typeface="Avenir Medium" panose="02000503020000020003" pitchFamily="2" charset="0"/>
-                <a:ea typeface="Bodoni Ornaments" pitchFamily="2" charset="0"/>
-              </a:rPr>
-              <a:t>His blood was the payment, </a:t>
-            </a:r>
-          </a:p>
-          <a:p>
-            <a:endParaRPr lang="en-US" sz="4400" dirty="0">
-              <a:solidFill>
-                <a:schemeClr val="bg1"/>
-              </a:solidFill>
-              <a:latin typeface="Avenir Medium" panose="02000503020000020003" pitchFamily="2" charset="0"/>
-              <a:ea typeface="Bodoni Ornaments" pitchFamily="2" charset="0"/>
-            </a:endParaRPr>
-          </a:p>
-          <a:p>
-            <a:r>
-              <a:rPr lang="en-US" sz="4400" dirty="0">
-                <a:solidFill>
-                  <a:schemeClr val="bg1"/>
-                </a:solidFill>
-                <a:latin typeface="Avenir Medium" panose="02000503020000020003" pitchFamily="2" charset="0"/>
-                <a:ea typeface="Bodoni Ornaments" pitchFamily="2" charset="0"/>
-              </a:rPr>
-              <a:t>His life was the cost</a:t>
-            </a:r>
-          </a:p>
-        </p:txBody>
-      </p:sp>
-    </p:spTree>
-    <p:extLst>
-      <p:ext uri="{BB962C8B-B14F-4D97-AF65-F5344CB8AC3E}">
-        <p14:creationId xmlns:p14="http://schemas.microsoft.com/office/powerpoint/2010/main" val="1157592653"/>
-      </p:ext>
-    </p:extLst>
-  </p:cSld>
-  <p:clrMapOvr>
-    <a:masterClrMapping/>
-  </p:clrMapOvr>
-</p:sld>
-</file>
-
-<file path=ppt/slides/slide13.xml><?xml version="1.0" encoding="utf-8"?>
-<p:sld xmlns:a="http://schemas.openxmlformats.org/drawingml/2006/main" xmlns:r="http://schemas.openxmlformats.org/officeDocument/2006/relationships" xmlns:p="http://schemas.openxmlformats.org/presentationml/2006/main">
-  <p:cSld>
-    <p:bg>
-      <p:bgPr>
-        <a:solidFill>
-          <a:schemeClr val="accent1"/>
-        </a:solidFill>
-        <a:effectLst/>
-      </p:bgPr>
-    </p:bg>
-    <p:spTree>
-      <p:nvGrpSpPr>
-        <p:cNvPr id="1" name="">
-          <a:extLst>
-            <a:ext uri="{FF2B5EF4-FFF2-40B4-BE49-F238E27FC236}">
-              <a16:creationId xmlns:a16="http://schemas.microsoft.com/office/drawing/2014/main" id="{2FE6B65D-96F1-5B6D-9D9A-933A4AAB94A5}"/>
-            </a:ext>
-          </a:extLst>
-        </p:cNvPr>
-        <p:cNvGrpSpPr/>
-        <p:nvPr/>
-      </p:nvGrpSpPr>
-      <p:grpSpPr>
-        <a:xfrm>
-          <a:off x="0" y="0"/>
-          <a:ext cx="0" cy="0"/>
-          <a:chOff x="0" y="0"/>
-          <a:chExt cx="0" cy="0"/>
-        </a:xfrm>
-      </p:grpSpPr>
-      <p:sp>
-        <p:nvSpPr>
-          <p:cNvPr id="3" name="Subtitle 2">
-            <a:extLst>
-              <a:ext uri="{FF2B5EF4-FFF2-40B4-BE49-F238E27FC236}">
-                <a16:creationId xmlns:a16="http://schemas.microsoft.com/office/drawing/2014/main" id="{B27DBBAA-2033-906F-4C36-5619AE08FF31}"/>
-              </a:ext>
-            </a:extLst>
-          </p:cNvPr>
-          <p:cNvSpPr>
-            <a:spLocks noGrp="1"/>
-          </p:cNvSpPr>
-          <p:nvPr>
-            <p:ph type="subTitle" idx="1"/>
-          </p:nvPr>
-        </p:nvSpPr>
-        <p:spPr>
-          <a:xfrm>
-            <a:off x="682831" y="497702"/>
-            <a:ext cx="10826338" cy="5862596"/>
-          </a:xfrm>
-        </p:spPr>
-        <p:txBody>
-          <a:bodyPr>
-            <a:noAutofit/>
-          </a:bodyPr>
-          <a:lstStyle/>
-          <a:p>
-            <a:endParaRPr lang="en-US" sz="4400" dirty="0">
-              <a:solidFill>
-                <a:schemeClr val="bg1"/>
-              </a:solidFill>
-              <a:latin typeface="Avenir Medium" panose="02000503020000020003" pitchFamily="2" charset="0"/>
-              <a:ea typeface="Bodoni Ornaments" pitchFamily="2" charset="0"/>
-            </a:endParaRPr>
-          </a:p>
-          <a:p>
-            <a:r>
-              <a:rPr lang="en-US" sz="4400" dirty="0">
-                <a:solidFill>
-                  <a:schemeClr val="bg1"/>
-                </a:solidFill>
-                <a:latin typeface="Avenir Medium" panose="02000503020000020003" pitchFamily="2" charset="0"/>
-                <a:ea typeface="Bodoni Ornaments" pitchFamily="2" charset="0"/>
-              </a:rPr>
-              <a:t>We stood 'neath a debt </a:t>
-            </a:r>
-          </a:p>
-          <a:p>
-            <a:endParaRPr lang="en-US" sz="4400" dirty="0">
-              <a:solidFill>
-                <a:schemeClr val="bg1"/>
-              </a:solidFill>
-              <a:latin typeface="Avenir Medium" panose="02000503020000020003" pitchFamily="2" charset="0"/>
-              <a:ea typeface="Bodoni Ornaments" pitchFamily="2" charset="0"/>
-            </a:endParaRPr>
-          </a:p>
-          <a:p>
-            <a:r>
-              <a:rPr lang="en-US" sz="4400" dirty="0">
-                <a:solidFill>
-                  <a:schemeClr val="bg1"/>
-                </a:solidFill>
-                <a:latin typeface="Avenir Medium" panose="02000503020000020003" pitchFamily="2" charset="0"/>
-                <a:ea typeface="Bodoni Ornaments" pitchFamily="2" charset="0"/>
-              </a:rPr>
-              <a:t>we could never afford</a:t>
-            </a:r>
-          </a:p>
-          <a:p>
-            <a:endParaRPr lang="en-US" sz="4400" dirty="0">
-              <a:solidFill>
-                <a:schemeClr val="bg1"/>
-              </a:solidFill>
-              <a:latin typeface="Avenir Medium" panose="02000503020000020003" pitchFamily="2" charset="0"/>
-              <a:ea typeface="Bodoni Ornaments" pitchFamily="2" charset="0"/>
-            </a:endParaRPr>
-          </a:p>
-          <a:p>
-            <a:r>
-              <a:rPr lang="en-US" sz="4400" dirty="0">
-                <a:solidFill>
-                  <a:schemeClr val="bg1"/>
-                </a:solidFill>
-                <a:latin typeface="Avenir Medium" panose="02000503020000020003" pitchFamily="2" charset="0"/>
-                <a:ea typeface="Bodoni Ornaments" pitchFamily="2" charset="0"/>
-              </a:rPr>
-              <a:t>Our sins they are many, </a:t>
-            </a:r>
-          </a:p>
-          <a:p>
-            <a:endParaRPr lang="en-US" sz="4400" dirty="0">
-              <a:solidFill>
-                <a:schemeClr val="bg1"/>
-              </a:solidFill>
-              <a:latin typeface="Avenir Medium" panose="02000503020000020003" pitchFamily="2" charset="0"/>
-              <a:ea typeface="Bodoni Ornaments" pitchFamily="2" charset="0"/>
-            </a:endParaRPr>
-          </a:p>
-          <a:p>
-            <a:r>
-              <a:rPr lang="en-US" sz="4400" dirty="0">
-                <a:solidFill>
-                  <a:schemeClr val="bg1"/>
-                </a:solidFill>
-                <a:latin typeface="Avenir Medium" panose="02000503020000020003" pitchFamily="2" charset="0"/>
-                <a:ea typeface="Bodoni Ornaments" pitchFamily="2" charset="0"/>
-              </a:rPr>
-              <a:t>His mercy is more</a:t>
-            </a:r>
-          </a:p>
-        </p:txBody>
-      </p:sp>
-    </p:spTree>
-    <p:extLst>
-      <p:ext uri="{BB962C8B-B14F-4D97-AF65-F5344CB8AC3E}">
-        <p14:creationId xmlns:p14="http://schemas.microsoft.com/office/powerpoint/2010/main" val="1169012159"/>
-      </p:ext>
-    </p:extLst>
-  </p:cSld>
-  <p:clrMapOvr>
-    <a:masterClrMapping/>
-  </p:clrMapOvr>
-</p:sld>
-</file>
-
-<file path=ppt/slides/slide14.xml><?xml version="1.0" encoding="utf-8"?>
-<p:sld xmlns:a="http://schemas.openxmlformats.org/drawingml/2006/main" xmlns:r="http://schemas.openxmlformats.org/officeDocument/2006/relationships" xmlns:p="http://schemas.openxmlformats.org/presentationml/2006/main">
-  <p:cSld>
-    <p:bg>
-      <p:bgPr>
-        <a:solidFill>
-          <a:srgbClr val="7030A0"/>
-        </a:solidFill>
-        <a:effectLst/>
-      </p:bgPr>
-    </p:bg>
-    <p:spTree>
-      <p:nvGrpSpPr>
-        <p:cNvPr id="1" name="">
-          <a:extLst>
-            <a:ext uri="{FF2B5EF4-FFF2-40B4-BE49-F238E27FC236}">
-              <a16:creationId xmlns:a16="http://schemas.microsoft.com/office/drawing/2014/main" id="{C2EA5D3B-5A31-5698-7DF9-54DDEFAC9173}"/>
-            </a:ext>
-          </a:extLst>
-        </p:cNvPr>
-        <p:cNvGrpSpPr/>
-        <p:nvPr/>
-      </p:nvGrpSpPr>
-      <p:grpSpPr>
-        <a:xfrm>
-          <a:off x="0" y="0"/>
-          <a:ext cx="0" cy="0"/>
-          <a:chOff x="0" y="0"/>
-          <a:chExt cx="0" cy="0"/>
-        </a:xfrm>
-      </p:grpSpPr>
-      <p:sp>
-        <p:nvSpPr>
-          <p:cNvPr id="3" name="Subtitle 2">
-            <a:extLst>
-              <a:ext uri="{FF2B5EF4-FFF2-40B4-BE49-F238E27FC236}">
-                <a16:creationId xmlns:a16="http://schemas.microsoft.com/office/drawing/2014/main" id="{8198300B-F415-10BF-A959-7056D317E1FC}"/>
-              </a:ext>
-            </a:extLst>
-          </p:cNvPr>
-          <p:cNvSpPr>
-            <a:spLocks noGrp="1"/>
-          </p:cNvSpPr>
-          <p:nvPr>
-            <p:ph type="subTitle" idx="1"/>
-          </p:nvPr>
-        </p:nvSpPr>
-        <p:spPr>
-          <a:xfrm>
-            <a:off x="682831" y="497702"/>
-            <a:ext cx="10826338" cy="5862596"/>
-          </a:xfrm>
-        </p:spPr>
-        <p:txBody>
-          <a:bodyPr>
-            <a:noAutofit/>
-          </a:bodyPr>
-          <a:lstStyle/>
-          <a:p>
-            <a:endParaRPr lang="en-US" sz="4400" dirty="0">
-              <a:solidFill>
-                <a:schemeClr val="bg1"/>
-              </a:solidFill>
-              <a:latin typeface="Avenir Medium" panose="02000503020000020003" pitchFamily="2" charset="0"/>
-              <a:ea typeface="Bodoni Ornaments" pitchFamily="2" charset="0"/>
-            </a:endParaRPr>
-          </a:p>
-          <a:p>
-            <a:r>
-              <a:rPr lang="en-US" sz="4400" dirty="0">
-                <a:solidFill>
-                  <a:schemeClr val="bg1"/>
-                </a:solidFill>
-                <a:latin typeface="Avenir Medium" panose="02000503020000020003" pitchFamily="2" charset="0"/>
-                <a:ea typeface="Bodoni Ornaments" pitchFamily="2" charset="0"/>
-              </a:rPr>
-              <a:t>Praise the Lord, </a:t>
-            </a:r>
-            <a:br>
-              <a:rPr lang="en-US" sz="4400" dirty="0">
-                <a:solidFill>
-                  <a:schemeClr val="bg1"/>
-                </a:solidFill>
-                <a:latin typeface="Avenir Medium" panose="02000503020000020003" pitchFamily="2" charset="0"/>
-                <a:ea typeface="Bodoni Ornaments" pitchFamily="2" charset="0"/>
-              </a:rPr>
-            </a:br>
-            <a:endParaRPr lang="en-US" sz="4400" dirty="0">
-              <a:solidFill>
-                <a:schemeClr val="bg1"/>
-              </a:solidFill>
-              <a:latin typeface="Avenir Medium" panose="02000503020000020003" pitchFamily="2" charset="0"/>
-              <a:ea typeface="Bodoni Ornaments" pitchFamily="2" charset="0"/>
-            </a:endParaRPr>
-          </a:p>
-          <a:p>
-            <a:r>
-              <a:rPr lang="en-US" sz="4400" dirty="0">
-                <a:solidFill>
-                  <a:schemeClr val="bg1"/>
-                </a:solidFill>
-                <a:latin typeface="Avenir Medium" panose="02000503020000020003" pitchFamily="2" charset="0"/>
-                <a:ea typeface="Bodoni Ornaments" pitchFamily="2" charset="0"/>
-              </a:rPr>
-              <a:t>His mercy is more</a:t>
-            </a:r>
-          </a:p>
-          <a:p>
-            <a:endParaRPr lang="en-US" sz="4400" dirty="0">
-              <a:solidFill>
-                <a:schemeClr val="bg1"/>
-              </a:solidFill>
-              <a:latin typeface="Avenir Medium" panose="02000503020000020003" pitchFamily="2" charset="0"/>
-              <a:ea typeface="Bodoni Ornaments" pitchFamily="2" charset="0"/>
-            </a:endParaRPr>
-          </a:p>
-          <a:p>
-            <a:r>
-              <a:rPr lang="en-US" sz="4400" dirty="0">
-                <a:solidFill>
-                  <a:schemeClr val="bg1"/>
-                </a:solidFill>
-                <a:latin typeface="Avenir Medium" panose="02000503020000020003" pitchFamily="2" charset="0"/>
-                <a:ea typeface="Bodoni Ornaments" pitchFamily="2" charset="0"/>
-              </a:rPr>
-              <a:t>Stronger than darkness, </a:t>
-            </a:r>
-          </a:p>
-          <a:p>
-            <a:endParaRPr lang="en-US" sz="4400" dirty="0">
-              <a:solidFill>
-                <a:schemeClr val="bg1"/>
-              </a:solidFill>
-              <a:latin typeface="Avenir Medium" panose="02000503020000020003" pitchFamily="2" charset="0"/>
-              <a:ea typeface="Bodoni Ornaments" pitchFamily="2" charset="0"/>
-            </a:endParaRPr>
-          </a:p>
-          <a:p>
-            <a:r>
-              <a:rPr lang="en-US" sz="4400" dirty="0">
-                <a:solidFill>
-                  <a:schemeClr val="bg1"/>
-                </a:solidFill>
-                <a:latin typeface="Avenir Medium" panose="02000503020000020003" pitchFamily="2" charset="0"/>
-                <a:ea typeface="Bodoni Ornaments" pitchFamily="2" charset="0"/>
-              </a:rPr>
-              <a:t>new every morn</a:t>
-            </a:r>
-          </a:p>
-        </p:txBody>
-      </p:sp>
-    </p:spTree>
-    <p:extLst>
-      <p:ext uri="{BB962C8B-B14F-4D97-AF65-F5344CB8AC3E}">
-        <p14:creationId xmlns:p14="http://schemas.microsoft.com/office/powerpoint/2010/main" val="3938360840"/>
-      </p:ext>
-    </p:extLst>
-  </p:cSld>
-  <p:clrMapOvr>
-    <a:masterClrMapping/>
-  </p:clrMapOvr>
-</p:sld>
-</file>
-
-<file path=ppt/slides/slide15.xml><?xml version="1.0" encoding="utf-8"?>
-<p:sld xmlns:a="http://schemas.openxmlformats.org/drawingml/2006/main" xmlns:r="http://schemas.openxmlformats.org/officeDocument/2006/relationships" xmlns:p="http://schemas.openxmlformats.org/presentationml/2006/main">
-  <p:cSld>
-    <p:bg>
-      <p:bgPr>
-        <a:solidFill>
-          <a:srgbClr val="7030A0"/>
-        </a:solidFill>
-        <a:effectLst/>
-      </p:bgPr>
-    </p:bg>
-    <p:spTree>
-      <p:nvGrpSpPr>
-        <p:cNvPr id="1" name="">
-          <a:extLst>
-            <a:ext uri="{FF2B5EF4-FFF2-40B4-BE49-F238E27FC236}">
-              <a16:creationId xmlns:a16="http://schemas.microsoft.com/office/drawing/2014/main" id="{9877808D-1E46-8C81-5D76-B14D1413F0AC}"/>
-            </a:ext>
-          </a:extLst>
-        </p:cNvPr>
-        <p:cNvGrpSpPr/>
-        <p:nvPr/>
-      </p:nvGrpSpPr>
-      <p:grpSpPr>
-        <a:xfrm>
-          <a:off x="0" y="0"/>
-          <a:ext cx="0" cy="0"/>
-          <a:chOff x="0" y="0"/>
-          <a:chExt cx="0" cy="0"/>
-        </a:xfrm>
-      </p:grpSpPr>
-      <p:sp>
-        <p:nvSpPr>
-          <p:cNvPr id="3" name="Subtitle 2">
-            <a:extLst>
-              <a:ext uri="{FF2B5EF4-FFF2-40B4-BE49-F238E27FC236}">
-                <a16:creationId xmlns:a16="http://schemas.microsoft.com/office/drawing/2014/main" id="{06E42776-788D-F826-6994-B48B153D96FD}"/>
-              </a:ext>
-            </a:extLst>
-          </p:cNvPr>
-          <p:cNvSpPr>
-            <a:spLocks noGrp="1"/>
-          </p:cNvSpPr>
-          <p:nvPr>
-            <p:ph type="subTitle" idx="1"/>
-          </p:nvPr>
-        </p:nvSpPr>
-        <p:spPr>
-          <a:xfrm>
-            <a:off x="682831" y="497702"/>
-            <a:ext cx="10826338" cy="5862596"/>
-          </a:xfrm>
-        </p:spPr>
-        <p:txBody>
-          <a:bodyPr>
-            <a:noAutofit/>
-          </a:bodyPr>
-          <a:lstStyle/>
-          <a:p>
-            <a:endParaRPr lang="en-US" sz="4400" dirty="0">
-              <a:solidFill>
-                <a:schemeClr val="bg1"/>
-              </a:solidFill>
-              <a:latin typeface="Avenir Medium" panose="02000503020000020003" pitchFamily="2" charset="0"/>
-              <a:ea typeface="Bodoni Ornaments" pitchFamily="2" charset="0"/>
-            </a:endParaRPr>
-          </a:p>
-          <a:p>
-            <a:r>
-              <a:rPr lang="en-US" sz="4400" dirty="0">
-                <a:solidFill>
-                  <a:schemeClr val="bg1"/>
-                </a:solidFill>
-                <a:latin typeface="Avenir Medium" panose="02000503020000020003" pitchFamily="2" charset="0"/>
-                <a:ea typeface="Bodoni Ornaments" pitchFamily="2" charset="0"/>
-              </a:rPr>
-              <a:t>Our sins they are many, </a:t>
-            </a:r>
-          </a:p>
-          <a:p>
-            <a:r>
-              <a:rPr lang="en-US" sz="4400" dirty="0">
-                <a:solidFill>
-                  <a:schemeClr val="bg1"/>
-                </a:solidFill>
-                <a:latin typeface="Avenir Medium" panose="02000503020000020003" pitchFamily="2" charset="0"/>
-                <a:ea typeface="Bodoni Ornaments" pitchFamily="2" charset="0"/>
-              </a:rPr>
-              <a:t>His mercy is more</a:t>
-            </a:r>
-          </a:p>
-          <a:p>
-            <a:endParaRPr lang="en-US" sz="4400" dirty="0">
-              <a:solidFill>
-                <a:schemeClr val="bg1"/>
-              </a:solidFill>
-              <a:latin typeface="Avenir Medium" panose="02000503020000020003" pitchFamily="2" charset="0"/>
-              <a:ea typeface="Bodoni Ornaments" pitchFamily="2" charset="0"/>
-            </a:endParaRPr>
-          </a:p>
-          <a:p>
-            <a:r>
-              <a:rPr lang="en-US" sz="4400" dirty="0">
-                <a:solidFill>
-                  <a:schemeClr val="bg1"/>
-                </a:solidFill>
-                <a:latin typeface="Avenir Medium" panose="02000503020000020003" pitchFamily="2" charset="0"/>
-                <a:ea typeface="Bodoni Ornaments" pitchFamily="2" charset="0"/>
-              </a:rPr>
-              <a:t>Our sins they are many, </a:t>
-            </a:r>
-          </a:p>
-          <a:p>
-            <a:r>
-              <a:rPr lang="en-US" sz="4400" dirty="0">
-                <a:solidFill>
-                  <a:schemeClr val="bg1"/>
-                </a:solidFill>
-                <a:latin typeface="Avenir Medium" panose="02000503020000020003" pitchFamily="2" charset="0"/>
-                <a:ea typeface="Bodoni Ornaments" pitchFamily="2" charset="0"/>
-              </a:rPr>
-              <a:t>His mercy is more</a:t>
-            </a:r>
-          </a:p>
-          <a:p>
-            <a:endParaRPr lang="en-US" sz="4400" dirty="0">
-              <a:solidFill>
-                <a:schemeClr val="bg1"/>
-              </a:solidFill>
-              <a:latin typeface="Avenir Medium" panose="02000503020000020003" pitchFamily="2" charset="0"/>
-              <a:ea typeface="Bodoni Ornaments" pitchFamily="2" charset="0"/>
-            </a:endParaRPr>
-          </a:p>
-        </p:txBody>
-      </p:sp>
-    </p:spTree>
-    <p:extLst>
-      <p:ext uri="{BB962C8B-B14F-4D97-AF65-F5344CB8AC3E}">
-        <p14:creationId xmlns:p14="http://schemas.microsoft.com/office/powerpoint/2010/main" val="404716244"/>
-      </p:ext>
-    </p:extLst>
-  </p:cSld>
-  <p:clrMapOvr>
-    <a:masterClrMapping/>
-  </p:clrMapOvr>
-</p:sld>
-</file>
-
 <file path=ppt/slides/slide2.xml><?xml version="1.0" encoding="utf-8"?>
 <p:sld xmlns:a="http://schemas.openxmlformats.org/drawingml/2006/main" xmlns:r="http://schemas.openxmlformats.org/officeDocument/2006/relationships" xmlns:p="http://schemas.openxmlformats.org/presentationml/2006/main">
   <p:cSld>
@@ -4705,8 +3794,8 @@
         </p:nvSpPr>
         <p:spPr>
           <a:xfrm>
-            <a:off x="682831" y="497702"/>
-            <a:ext cx="10826338" cy="5862596"/>
+            <a:off x="682831" y="212035"/>
+            <a:ext cx="10826338" cy="6374295"/>
           </a:xfrm>
         </p:spPr>
         <p:txBody>
@@ -4715,7 +3804,8 @@
           </a:bodyPr>
           <a:lstStyle/>
           <a:p>
-            <a:endParaRPr lang="en-US" sz="4400" dirty="0">
+            <a:pPr algn="l"/>
+            <a:endParaRPr lang="en-US" sz="3600" dirty="0">
               <a:solidFill>
                 <a:schemeClr val="bg1"/>
               </a:solidFill>
@@ -4724,26 +3814,8 @@
             </a:endParaRPr>
           </a:p>
           <a:p>
-            <a:r>
-              <a:rPr lang="en-US" sz="4400" dirty="0">
-                <a:solidFill>
-                  <a:schemeClr val="bg1"/>
-                </a:solidFill>
-                <a:latin typeface="Avenir Medium" panose="02000503020000020003" pitchFamily="2" charset="0"/>
-                <a:ea typeface="Bodoni Ornaments" pitchFamily="2" charset="0"/>
-              </a:rPr>
-              <a:t>Praise the Lord, </a:t>
-            </a:r>
-            <a:br>
-              <a:rPr lang="en-US" sz="4400" dirty="0">
-                <a:solidFill>
-                  <a:schemeClr val="bg1"/>
-                </a:solidFill>
-                <a:latin typeface="Avenir Medium" panose="02000503020000020003" pitchFamily="2" charset="0"/>
-                <a:ea typeface="Bodoni Ornaments" pitchFamily="2" charset="0"/>
-              </a:rPr>
-            </a:br>
-            <a:endParaRPr lang="en-US" sz="4400" dirty="0">
+            <a:pPr algn="l"/>
+            <a:endParaRPr lang="en-US" sz="3600" dirty="0">
               <a:solidFill>
                 <a:schemeClr val="bg1"/>
               </a:solidFill>
@@ -4752,19 +3824,92 @@
             </a:endParaRPr>
           </a:p>
           <a:p>
-            <a:r>
-              <a:rPr lang="en-US" sz="4400" dirty="0">
+            <a:pPr algn="l"/>
+            <a:r>
+              <a:rPr lang="en-US" sz="3600" dirty="0">
+                <a:solidFill>
+                  <a:srgbClr val="FFFF00"/>
+                </a:solidFill>
+                <a:latin typeface="Avenir Medium" panose="02000503020000020003" pitchFamily="2" charset="0"/>
+                <a:ea typeface="Bodoni Ornaments" pitchFamily="2" charset="0"/>
+              </a:rPr>
+              <a:t>G               C G Em         D           C G Em</a:t>
+            </a:r>
+          </a:p>
+          <a:p>
+            <a:pPr algn="l"/>
+            <a:r>
+              <a:rPr lang="en-US" sz="3600" dirty="0">
                 <a:solidFill>
                   <a:schemeClr val="bg1"/>
                 </a:solidFill>
                 <a:latin typeface="Avenir Medium" panose="02000503020000020003" pitchFamily="2" charset="0"/>
                 <a:ea typeface="Bodoni Ornaments" pitchFamily="2" charset="0"/>
               </a:rPr>
-              <a:t>His mercy is more</a:t>
-            </a:r>
-          </a:p>
-          <a:p>
-            <a:endParaRPr lang="en-US" sz="4400" dirty="0">
+              <a:t>Praise the Lord,       His mercy is more</a:t>
+            </a:r>
+            <a:br>
+              <a:rPr lang="en-US" sz="3600" dirty="0">
+                <a:solidFill>
+                  <a:schemeClr val="bg1"/>
+                </a:solidFill>
+                <a:latin typeface="Avenir Medium" panose="02000503020000020003" pitchFamily="2" charset="0"/>
+                <a:ea typeface="Bodoni Ornaments" pitchFamily="2" charset="0"/>
+              </a:rPr>
+            </a:br>
+            <a:r>
+              <a:rPr lang="en-US" sz="3600" dirty="0">
+                <a:solidFill>
+                  <a:srgbClr val="FFFF00"/>
+                </a:solidFill>
+                <a:latin typeface="Avenir Medium" panose="02000503020000020003" pitchFamily="2" charset="0"/>
+                <a:ea typeface="Bodoni Ornaments" pitchFamily="2" charset="0"/>
+              </a:rPr>
+              <a:t>C                     D                D             Em</a:t>
+            </a:r>
+          </a:p>
+          <a:p>
+            <a:pPr algn="l"/>
+            <a:r>
+              <a:rPr lang="en-US" sz="3600" dirty="0">
+                <a:solidFill>
+                  <a:schemeClr val="bg1"/>
+                </a:solidFill>
+                <a:latin typeface="Avenir Medium" panose="02000503020000020003" pitchFamily="2" charset="0"/>
+                <a:ea typeface="Bodoni Ornaments" pitchFamily="2" charset="0"/>
+              </a:rPr>
+              <a:t>Stronger than darkness, new every morn</a:t>
+            </a:r>
+          </a:p>
+          <a:p>
+            <a:pPr algn="l"/>
+            <a:r>
+              <a:rPr lang="en-US" sz="3600" dirty="0">
+                <a:solidFill>
+                  <a:srgbClr val="FFFF00"/>
+                </a:solidFill>
+                <a:latin typeface="Avenir Medium" panose="02000503020000020003" pitchFamily="2" charset="0"/>
+                <a:ea typeface="Bodoni Ornaments" pitchFamily="2" charset="0"/>
+              </a:rPr>
+              <a:t>C                   G                      D              G</a:t>
+            </a:r>
+          </a:p>
+          <a:p>
+            <a:pPr algn="l"/>
+            <a:r>
+              <a:rPr lang="en-US" sz="3600" dirty="0">
+                <a:solidFill>
+                  <a:schemeClr val="bg1"/>
+                </a:solidFill>
+                <a:latin typeface="Avenir Medium" panose="02000503020000020003" pitchFamily="2" charset="0"/>
+                <a:ea typeface="Bodoni Ornaments" pitchFamily="2" charset="0"/>
+              </a:rPr>
+              <a:t>Our sins they are many, His mercy is more</a:t>
+            </a:r>
+          </a:p>
+          <a:p>
+            <a:pPr algn="l"/>
+            <a:endParaRPr lang="en-US" sz="3600" dirty="0">
               <a:solidFill>
                 <a:schemeClr val="bg1"/>
               </a:solidFill>
@@ -4773,37 +3918,14 @@
             </a:endParaRPr>
           </a:p>
           <a:p>
-            <a:r>
-              <a:rPr lang="en-US" sz="4400" dirty="0">
-                <a:solidFill>
-                  <a:schemeClr val="bg1"/>
-                </a:solidFill>
-                <a:latin typeface="Avenir Medium" panose="02000503020000020003" pitchFamily="2" charset="0"/>
-                <a:ea typeface="Bodoni Ornaments" pitchFamily="2" charset="0"/>
-              </a:rPr>
-              <a:t>Stronger than darkness, </a:t>
-            </a:r>
-          </a:p>
-          <a:p>
-            <a:endParaRPr lang="en-US" sz="4400" dirty="0">
+            <a:pPr algn="l"/>
+            <a:endParaRPr lang="en-US" sz="3600" dirty="0">
               <a:solidFill>
                 <a:schemeClr val="bg1"/>
               </a:solidFill>
               <a:latin typeface="Avenir Medium" panose="02000503020000020003" pitchFamily="2" charset="0"/>
               <a:ea typeface="Bodoni Ornaments" pitchFamily="2" charset="0"/>
             </a:endParaRPr>
-          </a:p>
-          <a:p>
-            <a:r>
-              <a:rPr lang="en-US" sz="4400" dirty="0">
-                <a:solidFill>
-                  <a:schemeClr val="bg1"/>
-                </a:solidFill>
-                <a:latin typeface="Avenir Medium" panose="02000503020000020003" pitchFamily="2" charset="0"/>
-                <a:ea typeface="Bodoni Ornaments" pitchFamily="2" charset="0"/>
-              </a:rPr>
-              <a:t>new every morn</a:t>
-            </a:r>
           </a:p>
         </p:txBody>
       </p:sp>
@@ -4821,121 +3943,6 @@
 </file>
 
 <file path=ppt/slides/slide3.xml><?xml version="1.0" encoding="utf-8"?>
-<p:sld xmlns:a="http://schemas.openxmlformats.org/drawingml/2006/main" xmlns:r="http://schemas.openxmlformats.org/officeDocument/2006/relationships" xmlns:p="http://schemas.openxmlformats.org/presentationml/2006/main">
-  <p:cSld>
-    <p:bg>
-      <p:bgPr>
-        <a:solidFill>
-          <a:srgbClr val="7030A0"/>
-        </a:solidFill>
-        <a:effectLst/>
-      </p:bgPr>
-    </p:bg>
-    <p:spTree>
-      <p:nvGrpSpPr>
-        <p:cNvPr id="1" name="">
-          <a:extLst>
-            <a:ext uri="{FF2B5EF4-FFF2-40B4-BE49-F238E27FC236}">
-              <a16:creationId xmlns:a16="http://schemas.microsoft.com/office/drawing/2014/main" id="{FD6171DC-FEDD-4A1C-FD22-D2CB403DDC21}"/>
-            </a:ext>
-          </a:extLst>
-        </p:cNvPr>
-        <p:cNvGrpSpPr/>
-        <p:nvPr/>
-      </p:nvGrpSpPr>
-      <p:grpSpPr>
-        <a:xfrm>
-          <a:off x="0" y="0"/>
-          <a:ext cx="0" cy="0"/>
-          <a:chOff x="0" y="0"/>
-          <a:chExt cx="0" cy="0"/>
-        </a:xfrm>
-      </p:grpSpPr>
-      <p:sp>
-        <p:nvSpPr>
-          <p:cNvPr id="3" name="Subtitle 2">
-            <a:extLst>
-              <a:ext uri="{FF2B5EF4-FFF2-40B4-BE49-F238E27FC236}">
-                <a16:creationId xmlns:a16="http://schemas.microsoft.com/office/drawing/2014/main" id="{E763502A-CAAA-C6D0-037F-1A6AA07A9772}"/>
-              </a:ext>
-            </a:extLst>
-          </p:cNvPr>
-          <p:cNvSpPr>
-            <a:spLocks noGrp="1"/>
-          </p:cNvSpPr>
-          <p:nvPr>
-            <p:ph type="subTitle" idx="1"/>
-          </p:nvPr>
-        </p:nvSpPr>
-        <p:spPr>
-          <a:xfrm>
-            <a:off x="682831" y="497702"/>
-            <a:ext cx="10826338" cy="5862596"/>
-          </a:xfrm>
-        </p:spPr>
-        <p:txBody>
-          <a:bodyPr>
-            <a:noAutofit/>
-          </a:bodyPr>
-          <a:lstStyle/>
-          <a:p>
-            <a:endParaRPr lang="en-US" sz="4400" dirty="0">
-              <a:solidFill>
-                <a:schemeClr val="bg1"/>
-              </a:solidFill>
-              <a:latin typeface="Avenir Medium" panose="02000503020000020003" pitchFamily="2" charset="0"/>
-              <a:ea typeface="Bodoni Ornaments" pitchFamily="2" charset="0"/>
-            </a:endParaRPr>
-          </a:p>
-          <a:p>
-            <a:r>
-              <a:rPr lang="en-US" sz="4400" dirty="0">
-                <a:solidFill>
-                  <a:schemeClr val="bg1"/>
-                </a:solidFill>
-                <a:latin typeface="Avenir Medium" panose="02000503020000020003" pitchFamily="2" charset="0"/>
-                <a:ea typeface="Bodoni Ornaments" pitchFamily="2" charset="0"/>
-              </a:rPr>
-              <a:t>Our sins they are many, </a:t>
-            </a:r>
-          </a:p>
-          <a:p>
-            <a:endParaRPr lang="en-US" sz="4400" dirty="0">
-              <a:solidFill>
-                <a:schemeClr val="bg1"/>
-              </a:solidFill>
-              <a:latin typeface="Avenir Medium" panose="02000503020000020003" pitchFamily="2" charset="0"/>
-              <a:ea typeface="Bodoni Ornaments" pitchFamily="2" charset="0"/>
-            </a:endParaRPr>
-          </a:p>
-          <a:p>
-            <a:r>
-              <a:rPr lang="en-US" sz="4400" dirty="0">
-                <a:solidFill>
-                  <a:schemeClr val="bg1"/>
-                </a:solidFill>
-                <a:latin typeface="Avenir Medium" panose="02000503020000020003" pitchFamily="2" charset="0"/>
-                <a:ea typeface="Bodoni Ornaments" pitchFamily="2" charset="0"/>
-              </a:rPr>
-              <a:t>His mercy is more</a:t>
-            </a:r>
-          </a:p>
-        </p:txBody>
-      </p:sp>
-    </p:spTree>
-    <p:extLst>
-      <p:ext uri="{BB962C8B-B14F-4D97-AF65-F5344CB8AC3E}">
-        <p14:creationId xmlns:p14="http://schemas.microsoft.com/office/powerpoint/2010/main" val="979178852"/>
-      </p:ext>
-    </p:extLst>
-  </p:cSld>
-  <p:clrMapOvr>
-    <a:masterClrMapping/>
-  </p:clrMapOvr>
-</p:sld>
-</file>
-
-<file path=ppt/slides/slide4.xml><?xml version="1.0" encoding="utf-8"?>
 <p:sld xmlns:a="http://schemas.openxmlformats.org/drawingml/2006/main" xmlns:r="http://schemas.openxmlformats.org/officeDocument/2006/relationships" xmlns:p="http://schemas.openxmlformats.org/presentationml/2006/main">
   <p:cSld>
     <p:bg>
@@ -4984,8 +3991,8 @@
         </p:nvSpPr>
         <p:spPr>
           <a:xfrm>
-            <a:off x="682831" y="497702"/>
-            <a:ext cx="10826338" cy="5862596"/>
+            <a:off x="682831" y="251791"/>
+            <a:ext cx="10826338" cy="6347792"/>
           </a:xfrm>
         </p:spPr>
         <p:txBody>
@@ -4994,17 +4001,35 @@
           </a:bodyPr>
           <a:lstStyle/>
           <a:p>
-            <a:endParaRPr lang="en-US" sz="4400" dirty="0">
-              <a:solidFill>
-                <a:schemeClr val="bg1"/>
-              </a:solidFill>
-              <a:latin typeface="Avenir Medium" panose="02000503020000020003" pitchFamily="2" charset="0"/>
-              <a:ea typeface="Bodoni Ornaments" pitchFamily="2" charset="0"/>
-            </a:endParaRPr>
-          </a:p>
-          <a:p>
-            <a:r>
-              <a:rPr lang="en-US" sz="4400" dirty="0">
+            <a:pPr algn="l"/>
+            <a:r>
+              <a:rPr lang="en-US" sz="3600" dirty="0">
+                <a:solidFill>
+                  <a:srgbClr val="FFFF00"/>
+                </a:solidFill>
+                <a:latin typeface="Avenir Medium" panose="02000503020000020003" pitchFamily="2" charset="0"/>
+                <a:ea typeface="Bodoni Ornaments" pitchFamily="2" charset="0"/>
+              </a:rPr>
+              <a:t> </a:t>
+            </a:r>
+          </a:p>
+          <a:p>
+            <a:pPr algn="l"/>
+            <a:r>
+              <a:rPr lang="en-US" sz="3600" dirty="0">
+                <a:solidFill>
+                  <a:srgbClr val="FFFF00"/>
+                </a:solidFill>
+                <a:latin typeface="Avenir Medium" panose="02000503020000020003" pitchFamily="2" charset="0"/>
+                <a:ea typeface="Bodoni Ornaments" pitchFamily="2" charset="0"/>
+              </a:rPr>
+              <a:t>         G           </a:t>
+            </a:r>
+          </a:p>
+          <a:p>
+            <a:pPr algn="l"/>
+            <a:r>
+              <a:rPr lang="en-US" sz="3600" dirty="0">
                 <a:solidFill>
                   <a:schemeClr val="bg1"/>
                 </a:solidFill>
@@ -5015,17 +4040,22 @@
             </a:r>
           </a:p>
           <a:p>
-            <a:endParaRPr lang="en-US" sz="4400" dirty="0">
-              <a:solidFill>
-                <a:schemeClr val="bg1"/>
-              </a:solidFill>
-              <a:latin typeface="Avenir Medium" panose="02000503020000020003" pitchFamily="2" charset="0"/>
-              <a:ea typeface="Bodoni Ornaments" pitchFamily="2" charset="0"/>
-            </a:endParaRPr>
-          </a:p>
-          <a:p>
-            <a:r>
-              <a:rPr lang="en-US" sz="4400" dirty="0">
+            <a:pPr algn="l"/>
+            <a:r>
+              <a:rPr lang="en-US" sz="3600" dirty="0">
+                <a:solidFill>
+                  <a:srgbClr val="FFFF00"/>
+                </a:solidFill>
+                <a:latin typeface="Avenir Medium" panose="02000503020000020003" pitchFamily="2" charset="0"/>
+                <a:ea typeface="Bodoni Ornaments" pitchFamily="2" charset="0"/>
+              </a:rPr>
+              <a:t>     C                         G</a:t>
+            </a:r>
+          </a:p>
+          <a:p>
+            <a:pPr algn="l"/>
+            <a:r>
+              <a:rPr lang="en-US" sz="3600" dirty="0">
                 <a:solidFill>
                   <a:schemeClr val="bg1"/>
                 </a:solidFill>
@@ -5036,17 +4066,22 @@
             </a:r>
           </a:p>
           <a:p>
-            <a:endParaRPr lang="en-US" sz="4400" dirty="0">
-              <a:solidFill>
-                <a:schemeClr val="bg1"/>
-              </a:solidFill>
-              <a:latin typeface="Avenir Medium" panose="02000503020000020003" pitchFamily="2" charset="0"/>
-              <a:ea typeface="Bodoni Ornaments" pitchFamily="2" charset="0"/>
-            </a:endParaRPr>
-          </a:p>
-          <a:p>
-            <a:r>
-              <a:rPr lang="en-US" sz="4400" dirty="0">
+            <a:pPr algn="l"/>
+            <a:r>
+              <a:rPr lang="en-US" sz="3600" dirty="0">
+                <a:solidFill>
+                  <a:srgbClr val="FFFF00"/>
+                </a:solidFill>
+                <a:latin typeface="Avenir Medium" panose="02000503020000020003" pitchFamily="2" charset="0"/>
+                <a:ea typeface="Bodoni Ornaments" pitchFamily="2" charset="0"/>
+              </a:rPr>
+              <a:t>      D               Em</a:t>
+            </a:r>
+          </a:p>
+          <a:p>
+            <a:pPr algn="l"/>
+            <a:r>
+              <a:rPr lang="en-US" sz="3600" dirty="0">
                 <a:solidFill>
                   <a:schemeClr val="bg1"/>
                 </a:solidFill>
@@ -5057,17 +4092,22 @@
             </a:r>
           </a:p>
           <a:p>
-            <a:endParaRPr lang="en-US" sz="4400" dirty="0">
-              <a:solidFill>
-                <a:schemeClr val="bg1"/>
-              </a:solidFill>
-              <a:latin typeface="Avenir Medium" panose="02000503020000020003" pitchFamily="2" charset="0"/>
-              <a:ea typeface="Bodoni Ornaments" pitchFamily="2" charset="0"/>
-            </a:endParaRPr>
-          </a:p>
-          <a:p>
-            <a:r>
-              <a:rPr lang="en-US" sz="4400" dirty="0">
+            <a:pPr algn="l"/>
+            <a:r>
+              <a:rPr lang="en-US" sz="3600" dirty="0">
+                <a:solidFill>
+                  <a:srgbClr val="FFFF00"/>
+                </a:solidFill>
+                <a:latin typeface="Avenir Medium" panose="02000503020000020003" pitchFamily="2" charset="0"/>
+                <a:ea typeface="Bodoni Ornaments" pitchFamily="2" charset="0"/>
+              </a:rPr>
+              <a:t>      C                        D</a:t>
+            </a:r>
+          </a:p>
+          <a:p>
+            <a:pPr algn="l"/>
+            <a:r>
+              <a:rPr lang="en-US" sz="3600" dirty="0">
                 <a:solidFill>
                   <a:schemeClr val="bg1"/>
                 </a:solidFill>
@@ -5092,7 +4132,7 @@
 </p:sld>
 </file>
 
-<file path=ppt/slides/slide5.xml><?xml version="1.0" encoding="utf-8"?>
+<file path=ppt/slides/slide4.xml><?xml version="1.0" encoding="utf-8"?>
 <p:sld xmlns:a="http://schemas.openxmlformats.org/drawingml/2006/main" xmlns:r="http://schemas.openxmlformats.org/officeDocument/2006/relationships" xmlns:p="http://schemas.openxmlformats.org/presentationml/2006/main">
   <p:cSld>
     <p:bg>
@@ -5141,8 +4181,8 @@
         </p:nvSpPr>
         <p:spPr>
           <a:xfrm>
-            <a:off x="682831" y="497702"/>
-            <a:ext cx="10826338" cy="5862596"/>
+            <a:off x="682831" y="238539"/>
+            <a:ext cx="10826338" cy="6387548"/>
           </a:xfrm>
         </p:spPr>
         <p:txBody>
@@ -5151,17 +4191,35 @@
           </a:bodyPr>
           <a:lstStyle/>
           <a:p>
-            <a:endParaRPr lang="en-US" sz="4400" dirty="0">
-              <a:solidFill>
-                <a:schemeClr val="bg1"/>
-              </a:solidFill>
-              <a:latin typeface="Avenir Medium" panose="02000503020000020003" pitchFamily="2" charset="0"/>
-              <a:ea typeface="Bodoni Ornaments" pitchFamily="2" charset="0"/>
-            </a:endParaRPr>
-          </a:p>
-          <a:p>
-            <a:r>
-              <a:rPr lang="en-US" sz="4400" dirty="0">
+            <a:pPr algn="l"/>
+            <a:r>
+              <a:rPr lang="en-US" sz="3600" dirty="0">
+                <a:solidFill>
+                  <a:srgbClr val="FFFF00"/>
+                </a:solidFill>
+                <a:latin typeface="Avenir Medium" panose="02000503020000020003" pitchFamily="2" charset="0"/>
+                <a:ea typeface="Bodoni Ornaments" pitchFamily="2" charset="0"/>
+              </a:rPr>
+              <a:t> </a:t>
+            </a:r>
+          </a:p>
+          <a:p>
+            <a:pPr algn="l"/>
+            <a:r>
+              <a:rPr lang="en-US" sz="3600" dirty="0">
+                <a:solidFill>
+                  <a:srgbClr val="FFFF00"/>
+                </a:solidFill>
+                <a:latin typeface="Avenir Medium" panose="02000503020000020003" pitchFamily="2" charset="0"/>
+                <a:ea typeface="Bodoni Ornaments" pitchFamily="2" charset="0"/>
+              </a:rPr>
+              <a:t>            G     Am</a:t>
+            </a:r>
+          </a:p>
+          <a:p>
+            <a:pPr algn="l"/>
+            <a:r>
+              <a:rPr lang="en-US" sz="3600" dirty="0">
                 <a:solidFill>
                   <a:schemeClr val="bg1"/>
                 </a:solidFill>
@@ -5172,17 +4230,22 @@
             </a:r>
           </a:p>
           <a:p>
-            <a:endParaRPr lang="en-US" sz="4400" dirty="0">
-              <a:solidFill>
-                <a:schemeClr val="bg1"/>
-              </a:solidFill>
-              <a:latin typeface="Avenir Medium" panose="02000503020000020003" pitchFamily="2" charset="0"/>
-              <a:ea typeface="Bodoni Ornaments" pitchFamily="2" charset="0"/>
-            </a:endParaRPr>
-          </a:p>
-          <a:p>
-            <a:r>
-              <a:rPr lang="en-US" sz="4400" dirty="0">
+            <a:pPr algn="l"/>
+            <a:r>
+              <a:rPr lang="en-US" sz="3600" dirty="0">
+                <a:solidFill>
+                  <a:srgbClr val="FFFF00"/>
+                </a:solidFill>
+                <a:latin typeface="Avenir Medium" panose="02000503020000020003" pitchFamily="2" charset="0"/>
+                <a:ea typeface="Bodoni Ornaments" pitchFamily="2" charset="0"/>
+              </a:rPr>
+              <a:t>             G                 C</a:t>
+            </a:r>
+          </a:p>
+          <a:p>
+            <a:pPr algn="l"/>
+            <a:r>
+              <a:rPr lang="en-US" sz="3600" dirty="0">
                 <a:solidFill>
                   <a:schemeClr val="bg1"/>
                 </a:solidFill>
@@ -5193,17 +4256,22 @@
             </a:r>
           </a:p>
           <a:p>
-            <a:endParaRPr lang="en-US" sz="4400" dirty="0">
-              <a:solidFill>
-                <a:schemeClr val="bg1"/>
-              </a:solidFill>
-              <a:latin typeface="Avenir Medium" panose="02000503020000020003" pitchFamily="2" charset="0"/>
-              <a:ea typeface="Bodoni Ornaments" pitchFamily="2" charset="0"/>
-            </a:endParaRPr>
-          </a:p>
-          <a:p>
-            <a:r>
-              <a:rPr lang="en-US" sz="4400" dirty="0">
+            <a:pPr algn="l"/>
+            <a:r>
+              <a:rPr lang="en-US" sz="3600" dirty="0">
+                <a:solidFill>
+                  <a:srgbClr val="FFFF00"/>
+                </a:solidFill>
+                <a:latin typeface="Avenir Medium" panose="02000503020000020003" pitchFamily="2" charset="0"/>
+                <a:ea typeface="Bodoni Ornaments" pitchFamily="2" charset="0"/>
+              </a:rPr>
+              <a:t>       C                   G</a:t>
+            </a:r>
+          </a:p>
+          <a:p>
+            <a:pPr algn="l"/>
+            <a:r>
+              <a:rPr lang="en-US" sz="3600" dirty="0">
                 <a:solidFill>
                   <a:schemeClr val="bg1"/>
                 </a:solidFill>
@@ -5214,17 +4282,22 @@
             </a:r>
           </a:p>
           <a:p>
-            <a:endParaRPr lang="en-US" sz="4400" dirty="0">
-              <a:solidFill>
-                <a:schemeClr val="bg1"/>
-              </a:solidFill>
-              <a:latin typeface="Avenir Medium" panose="02000503020000020003" pitchFamily="2" charset="0"/>
-              <a:ea typeface="Bodoni Ornaments" pitchFamily="2" charset="0"/>
-            </a:endParaRPr>
-          </a:p>
-          <a:p>
-            <a:r>
-              <a:rPr lang="en-US" sz="4400" dirty="0">
+            <a:pPr algn="l"/>
+            <a:r>
+              <a:rPr lang="en-US" sz="3600" dirty="0">
+                <a:solidFill>
+                  <a:srgbClr val="FFFF00"/>
+                </a:solidFill>
+                <a:latin typeface="Avenir Medium" panose="02000503020000020003" pitchFamily="2" charset="0"/>
+                <a:ea typeface="Bodoni Ornaments" pitchFamily="2" charset="0"/>
+              </a:rPr>
+              <a:t>      D            G</a:t>
+            </a:r>
+          </a:p>
+          <a:p>
+            <a:pPr algn="l"/>
+            <a:r>
+              <a:rPr lang="en-US" sz="3600" dirty="0">
                 <a:solidFill>
                   <a:schemeClr val="bg1"/>
                 </a:solidFill>
@@ -5249,7 +4322,7 @@
 </p:sld>
 </file>
 
-<file path=ppt/slides/slide6.xml><?xml version="1.0" encoding="utf-8"?>
+<file path=ppt/slides/slide5.xml><?xml version="1.0" encoding="utf-8"?>
 <p:sld xmlns:a="http://schemas.openxmlformats.org/drawingml/2006/main" xmlns:r="http://schemas.openxmlformats.org/officeDocument/2006/relationships" xmlns:p="http://schemas.openxmlformats.org/presentationml/2006/main">
   <p:cSld>
     <p:bg>
@@ -5265,7 +4338,7 @@
         <p:cNvPr id="1" name="">
           <a:extLst>
             <a:ext uri="{FF2B5EF4-FFF2-40B4-BE49-F238E27FC236}">
-              <a16:creationId xmlns:a16="http://schemas.microsoft.com/office/drawing/2014/main" id="{3BBC21AE-62D7-8212-9813-7A15697E49E3}"/>
+              <a16:creationId xmlns:a16="http://schemas.microsoft.com/office/drawing/2014/main" id="{69180F83-840A-7D60-3E61-EB069DA8F487}"/>
             </a:ext>
           </a:extLst>
         </p:cNvPr>
@@ -5285,7 +4358,7 @@
           <p:cNvPr id="3" name="Subtitle 2">
             <a:extLst>
               <a:ext uri="{FF2B5EF4-FFF2-40B4-BE49-F238E27FC236}">
-                <a16:creationId xmlns:a16="http://schemas.microsoft.com/office/drawing/2014/main" id="{C0D279BC-EC6B-E7D7-BEC4-D6AC900897E4}"/>
+                <a16:creationId xmlns:a16="http://schemas.microsoft.com/office/drawing/2014/main" id="{EDE36D67-5F5B-1302-0FF4-08B06953C484}"/>
               </a:ext>
             </a:extLst>
           </p:cNvPr>
@@ -5298,8 +4371,8 @@
         </p:nvSpPr>
         <p:spPr>
           <a:xfrm>
-            <a:off x="682831" y="497702"/>
-            <a:ext cx="10826338" cy="5862596"/>
+            <a:off x="682831" y="212035"/>
+            <a:ext cx="10826338" cy="6374295"/>
           </a:xfrm>
         </p:spPr>
         <p:txBody>
@@ -5308,7 +4381,8 @@
           </a:bodyPr>
           <a:lstStyle/>
           <a:p>
-            <a:endParaRPr lang="en-US" sz="4400" dirty="0">
+            <a:pPr algn="l"/>
+            <a:endParaRPr lang="en-US" sz="3600" dirty="0">
               <a:solidFill>
                 <a:schemeClr val="bg1"/>
               </a:solidFill>
@@ -5317,26 +4391,8 @@
             </a:endParaRPr>
           </a:p>
           <a:p>
-            <a:r>
-              <a:rPr lang="en-US" sz="4400" dirty="0">
-                <a:solidFill>
-                  <a:schemeClr val="bg1"/>
-                </a:solidFill>
-                <a:latin typeface="Avenir Medium" panose="02000503020000020003" pitchFamily="2" charset="0"/>
-                <a:ea typeface="Bodoni Ornaments" pitchFamily="2" charset="0"/>
-              </a:rPr>
-              <a:t>Praise the Lord, </a:t>
-            </a:r>
-            <a:br>
-              <a:rPr lang="en-US" sz="4400" dirty="0">
-                <a:solidFill>
-                  <a:schemeClr val="bg1"/>
-                </a:solidFill>
-                <a:latin typeface="Avenir Medium" panose="02000503020000020003" pitchFamily="2" charset="0"/>
-                <a:ea typeface="Bodoni Ornaments" pitchFamily="2" charset="0"/>
-              </a:rPr>
-            </a:br>
-            <a:endParaRPr lang="en-US" sz="4400" dirty="0">
+            <a:pPr algn="l"/>
+            <a:endParaRPr lang="en-US" sz="3600" dirty="0">
               <a:solidFill>
                 <a:schemeClr val="bg1"/>
               </a:solidFill>
@@ -5345,19 +4401,92 @@
             </a:endParaRPr>
           </a:p>
           <a:p>
-            <a:r>
-              <a:rPr lang="en-US" sz="4400" dirty="0">
+            <a:pPr algn="l"/>
+            <a:r>
+              <a:rPr lang="en-US" sz="3600" dirty="0">
+                <a:solidFill>
+                  <a:srgbClr val="FFFF00"/>
+                </a:solidFill>
+                <a:latin typeface="Avenir Medium" panose="02000503020000020003" pitchFamily="2" charset="0"/>
+                <a:ea typeface="Bodoni Ornaments" pitchFamily="2" charset="0"/>
+              </a:rPr>
+              <a:t>G               C G Em         D           C G Em</a:t>
+            </a:r>
+          </a:p>
+          <a:p>
+            <a:pPr algn="l"/>
+            <a:r>
+              <a:rPr lang="en-US" sz="3600" dirty="0">
                 <a:solidFill>
                   <a:schemeClr val="bg1"/>
                 </a:solidFill>
                 <a:latin typeface="Avenir Medium" panose="02000503020000020003" pitchFamily="2" charset="0"/>
                 <a:ea typeface="Bodoni Ornaments" pitchFamily="2" charset="0"/>
               </a:rPr>
-              <a:t>His mercy is more</a:t>
-            </a:r>
-          </a:p>
-          <a:p>
-            <a:endParaRPr lang="en-US" sz="4400" dirty="0">
+              <a:t>Praise the Lord,       His mercy is more</a:t>
+            </a:r>
+            <a:br>
+              <a:rPr lang="en-US" sz="3600" dirty="0">
+                <a:solidFill>
+                  <a:schemeClr val="bg1"/>
+                </a:solidFill>
+                <a:latin typeface="Avenir Medium" panose="02000503020000020003" pitchFamily="2" charset="0"/>
+                <a:ea typeface="Bodoni Ornaments" pitchFamily="2" charset="0"/>
+              </a:rPr>
+            </a:br>
+            <a:r>
+              <a:rPr lang="en-US" sz="3600" dirty="0">
+                <a:solidFill>
+                  <a:srgbClr val="FFFF00"/>
+                </a:solidFill>
+                <a:latin typeface="Avenir Medium" panose="02000503020000020003" pitchFamily="2" charset="0"/>
+                <a:ea typeface="Bodoni Ornaments" pitchFamily="2" charset="0"/>
+              </a:rPr>
+              <a:t>C                     D                D             Em</a:t>
+            </a:r>
+          </a:p>
+          <a:p>
+            <a:pPr algn="l"/>
+            <a:r>
+              <a:rPr lang="en-US" sz="3600" dirty="0">
+                <a:solidFill>
+                  <a:schemeClr val="bg1"/>
+                </a:solidFill>
+                <a:latin typeface="Avenir Medium" panose="02000503020000020003" pitchFamily="2" charset="0"/>
+                <a:ea typeface="Bodoni Ornaments" pitchFamily="2" charset="0"/>
+              </a:rPr>
+              <a:t>Stronger than darkness, new every morn</a:t>
+            </a:r>
+          </a:p>
+          <a:p>
+            <a:pPr algn="l"/>
+            <a:r>
+              <a:rPr lang="en-US" sz="3600" dirty="0">
+                <a:solidFill>
+                  <a:srgbClr val="FFFF00"/>
+                </a:solidFill>
+                <a:latin typeface="Avenir Medium" panose="02000503020000020003" pitchFamily="2" charset="0"/>
+                <a:ea typeface="Bodoni Ornaments" pitchFamily="2" charset="0"/>
+              </a:rPr>
+              <a:t>C                   G                      D              G</a:t>
+            </a:r>
+          </a:p>
+          <a:p>
+            <a:pPr algn="l"/>
+            <a:r>
+              <a:rPr lang="en-US" sz="3600" dirty="0">
+                <a:solidFill>
+                  <a:schemeClr val="bg1"/>
+                </a:solidFill>
+                <a:latin typeface="Avenir Medium" panose="02000503020000020003" pitchFamily="2" charset="0"/>
+                <a:ea typeface="Bodoni Ornaments" pitchFamily="2" charset="0"/>
+              </a:rPr>
+              <a:t>Our sins they are many, His mercy is more</a:t>
+            </a:r>
+          </a:p>
+          <a:p>
+            <a:pPr algn="l"/>
+            <a:endParaRPr lang="en-US" sz="3600" dirty="0">
               <a:solidFill>
                 <a:schemeClr val="bg1"/>
               </a:solidFill>
@@ -5366,19 +4495,8 @@
             </a:endParaRPr>
           </a:p>
           <a:p>
-            <a:r>
-              <a:rPr lang="en-US" sz="4400" dirty="0">
-                <a:solidFill>
-                  <a:schemeClr val="bg1"/>
-                </a:solidFill>
-                <a:latin typeface="Avenir Medium" panose="02000503020000020003" pitchFamily="2" charset="0"/>
-                <a:ea typeface="Bodoni Ornaments" pitchFamily="2" charset="0"/>
-              </a:rPr>
-              <a:t>Stronger than darkness, </a:t>
-            </a:r>
-          </a:p>
-          <a:p>
-            <a:endParaRPr lang="en-US" sz="4400" dirty="0">
+            <a:pPr algn="l"/>
+            <a:endParaRPr lang="en-US" sz="3600" dirty="0">
               <a:solidFill>
                 <a:schemeClr val="bg1"/>
               </a:solidFill>
@@ -5386,24 +4504,12 @@
               <a:ea typeface="Bodoni Ornaments" pitchFamily="2" charset="0"/>
             </a:endParaRPr>
           </a:p>
-          <a:p>
-            <a:r>
-              <a:rPr lang="en-US" sz="4400" dirty="0">
-                <a:solidFill>
-                  <a:schemeClr val="bg1"/>
-                </a:solidFill>
-                <a:latin typeface="Avenir Medium" panose="02000503020000020003" pitchFamily="2" charset="0"/>
-                <a:ea typeface="Bodoni Ornaments" pitchFamily="2" charset="0"/>
-              </a:rPr>
-              <a:t>new every morn</a:t>
-            </a:r>
-          </a:p>
         </p:txBody>
       </p:sp>
     </p:spTree>
     <p:extLst>
       <p:ext uri="{BB962C8B-B14F-4D97-AF65-F5344CB8AC3E}">
-        <p14:creationId xmlns:p14="http://schemas.microsoft.com/office/powerpoint/2010/main" val="2267121982"/>
+        <p14:creationId xmlns:p14="http://schemas.microsoft.com/office/powerpoint/2010/main" val="916381906"/>
       </p:ext>
     </p:extLst>
   </p:cSld>
@@ -5413,122 +4519,7 @@
 </p:sld>
 </file>
 
-<file path=ppt/slides/slide7.xml><?xml version="1.0" encoding="utf-8"?>
-<p:sld xmlns:a="http://schemas.openxmlformats.org/drawingml/2006/main" xmlns:r="http://schemas.openxmlformats.org/officeDocument/2006/relationships" xmlns:p="http://schemas.openxmlformats.org/presentationml/2006/main">
-  <p:cSld>
-    <p:bg>
-      <p:bgPr>
-        <a:solidFill>
-          <a:srgbClr val="7030A0"/>
-        </a:solidFill>
-        <a:effectLst/>
-      </p:bgPr>
-    </p:bg>
-    <p:spTree>
-      <p:nvGrpSpPr>
-        <p:cNvPr id="1" name="">
-          <a:extLst>
-            <a:ext uri="{FF2B5EF4-FFF2-40B4-BE49-F238E27FC236}">
-              <a16:creationId xmlns:a16="http://schemas.microsoft.com/office/drawing/2014/main" id="{399461BD-C845-840A-EAC2-ABDFCD100904}"/>
-            </a:ext>
-          </a:extLst>
-        </p:cNvPr>
-        <p:cNvGrpSpPr/>
-        <p:nvPr/>
-      </p:nvGrpSpPr>
-      <p:grpSpPr>
-        <a:xfrm>
-          <a:off x="0" y="0"/>
-          <a:ext cx="0" cy="0"/>
-          <a:chOff x="0" y="0"/>
-          <a:chExt cx="0" cy="0"/>
-        </a:xfrm>
-      </p:grpSpPr>
-      <p:sp>
-        <p:nvSpPr>
-          <p:cNvPr id="3" name="Subtitle 2">
-            <a:extLst>
-              <a:ext uri="{FF2B5EF4-FFF2-40B4-BE49-F238E27FC236}">
-                <a16:creationId xmlns:a16="http://schemas.microsoft.com/office/drawing/2014/main" id="{A9C29F60-22B1-3E8D-ED2C-9A01A471A762}"/>
-              </a:ext>
-            </a:extLst>
-          </p:cNvPr>
-          <p:cNvSpPr>
-            <a:spLocks noGrp="1"/>
-          </p:cNvSpPr>
-          <p:nvPr>
-            <p:ph type="subTitle" idx="1"/>
-          </p:nvPr>
-        </p:nvSpPr>
-        <p:spPr>
-          <a:xfrm>
-            <a:off x="682831" y="497702"/>
-            <a:ext cx="10826338" cy="5862596"/>
-          </a:xfrm>
-        </p:spPr>
-        <p:txBody>
-          <a:bodyPr>
-            <a:noAutofit/>
-          </a:bodyPr>
-          <a:lstStyle/>
-          <a:p>
-            <a:endParaRPr lang="en-US" sz="4400" dirty="0">
-              <a:solidFill>
-                <a:schemeClr val="bg1"/>
-              </a:solidFill>
-              <a:latin typeface="Avenir Medium" panose="02000503020000020003" pitchFamily="2" charset="0"/>
-              <a:ea typeface="Bodoni Ornaments" pitchFamily="2" charset="0"/>
-            </a:endParaRPr>
-          </a:p>
-          <a:p>
-            <a:r>
-              <a:rPr lang="en-US" sz="4400" dirty="0">
-                <a:solidFill>
-                  <a:schemeClr val="bg1"/>
-                </a:solidFill>
-                <a:latin typeface="Avenir Medium" panose="02000503020000020003" pitchFamily="2" charset="0"/>
-                <a:ea typeface="Bodoni Ornaments" pitchFamily="2" charset="0"/>
-              </a:rPr>
-              <a:t>Our sins they are many, </a:t>
-            </a:r>
-          </a:p>
-          <a:p>
-            <a:endParaRPr lang="en-US" sz="4400" dirty="0">
-              <a:solidFill>
-                <a:schemeClr val="bg1"/>
-              </a:solidFill>
-              <a:latin typeface="Avenir Medium" panose="02000503020000020003" pitchFamily="2" charset="0"/>
-              <a:ea typeface="Bodoni Ornaments" pitchFamily="2" charset="0"/>
-            </a:endParaRPr>
-          </a:p>
-          <a:p>
-            <a:r>
-              <a:rPr lang="en-US" sz="4400" dirty="0">
-                <a:solidFill>
-                  <a:schemeClr val="bg1"/>
-                </a:solidFill>
-                <a:latin typeface="Avenir Medium" panose="02000503020000020003" pitchFamily="2" charset="0"/>
-                <a:ea typeface="Bodoni Ornaments" pitchFamily="2" charset="0"/>
-              </a:rPr>
-              <a:t>His mercy is more</a:t>
-            </a:r>
-          </a:p>
-        </p:txBody>
-      </p:sp>
-    </p:spTree>
-    <p:extLst>
-      <p:ext uri="{BB962C8B-B14F-4D97-AF65-F5344CB8AC3E}">
-        <p14:creationId xmlns:p14="http://schemas.microsoft.com/office/powerpoint/2010/main" val="3926302469"/>
-      </p:ext>
-    </p:extLst>
-  </p:cSld>
-  <p:clrMapOvr>
-    <a:masterClrMapping/>
-  </p:clrMapOvr>
-</p:sld>
-</file>
-
-<file path=ppt/slides/slide8.xml><?xml version="1.0" encoding="utf-8"?>
+<file path=ppt/slides/slide6.xml><?xml version="1.0" encoding="utf-8"?>
 <p:sld xmlns:a="http://schemas.openxmlformats.org/drawingml/2006/main" xmlns:r="http://schemas.openxmlformats.org/officeDocument/2006/relationships" xmlns:p="http://schemas.openxmlformats.org/presentationml/2006/main">
   <p:cSld>
     <p:bg>
@@ -5577,8 +4568,8 @@
         </p:nvSpPr>
         <p:spPr>
           <a:xfrm>
-            <a:off x="682831" y="497702"/>
-            <a:ext cx="10826338" cy="5862596"/>
+            <a:off x="682831" y="251791"/>
+            <a:ext cx="10826338" cy="6268279"/>
           </a:xfrm>
         </p:spPr>
         <p:txBody>
@@ -5587,7 +4578,8 @@
           </a:bodyPr>
           <a:lstStyle/>
           <a:p>
-            <a:endParaRPr lang="en-US" sz="4400" dirty="0">
+            <a:pPr algn="l"/>
+            <a:endParaRPr lang="en-US" sz="3600" dirty="0">
               <a:solidFill>
                 <a:schemeClr val="bg1"/>
               </a:solidFill>
@@ -5596,19 +4588,112 @@
             </a:endParaRPr>
           </a:p>
           <a:p>
-            <a:r>
-              <a:rPr lang="en-US" sz="4400" dirty="0">
+            <a:pPr algn="l"/>
+            <a:r>
+              <a:rPr lang="en-US" sz="3600" dirty="0">
+                <a:solidFill>
+                  <a:srgbClr val="FFFF00"/>
+                </a:solidFill>
+                <a:latin typeface="Avenir Medium" panose="02000503020000020003" pitchFamily="2" charset="0"/>
+                <a:ea typeface="Bodoni Ornaments" pitchFamily="2" charset="0"/>
+              </a:rPr>
+              <a:t>          G                                        C                G                </a:t>
+            </a:r>
+          </a:p>
+          <a:p>
+            <a:pPr algn="l"/>
+            <a:r>
+              <a:rPr lang="en-US" sz="3600" dirty="0">
                 <a:solidFill>
                   <a:schemeClr val="bg1"/>
                 </a:solidFill>
                 <a:latin typeface="Avenir Medium" panose="02000503020000020003" pitchFamily="2" charset="0"/>
                 <a:ea typeface="Bodoni Ornaments" pitchFamily="2" charset="0"/>
               </a:rPr>
-              <a:t>What patience would wait as we </a:t>
-            </a:r>
-          </a:p>
-          <a:p>
-            <a:endParaRPr lang="en-US" sz="4400" dirty="0">
+              <a:t>What patience would wait as we constantly roam</a:t>
+            </a:r>
+          </a:p>
+          <a:p>
+            <a:pPr algn="l"/>
+            <a:r>
+              <a:rPr lang="en-US" sz="3600" dirty="0">
+                <a:solidFill>
+                  <a:srgbClr val="FFFF00"/>
+                </a:solidFill>
+                <a:latin typeface="Avenir Medium" panose="02000503020000020003" pitchFamily="2" charset="0"/>
+                <a:ea typeface="Bodoni Ornaments" pitchFamily="2" charset="0"/>
+              </a:rPr>
+              <a:t>          D             Em            C            D</a:t>
+            </a:r>
+          </a:p>
+          <a:p>
+            <a:pPr algn="l"/>
+            <a:r>
+              <a:rPr lang="en-US" sz="3600" dirty="0">
+                <a:solidFill>
+                  <a:schemeClr val="bg1"/>
+                </a:solidFill>
+                <a:latin typeface="Avenir Medium" panose="02000503020000020003" pitchFamily="2" charset="0"/>
+                <a:ea typeface="Bodoni Ornaments" pitchFamily="2" charset="0"/>
+              </a:rPr>
+              <a:t>What Father so tender is calling us home</a:t>
+            </a:r>
+          </a:p>
+          <a:p>
+            <a:pPr algn="l"/>
+            <a:r>
+              <a:rPr lang="en-US" sz="3600" dirty="0">
+                <a:solidFill>
+                  <a:srgbClr val="FFFF00"/>
+                </a:solidFill>
+                <a:latin typeface="Avenir Medium" panose="02000503020000020003" pitchFamily="2" charset="0"/>
+                <a:ea typeface="Bodoni Ornaments" pitchFamily="2" charset="0"/>
+              </a:rPr>
+              <a:t>     G                     Am                G              C</a:t>
+            </a:r>
+          </a:p>
+          <a:p>
+            <a:pPr algn="l"/>
+            <a:r>
+              <a:rPr lang="en-US" sz="3600" dirty="0">
+                <a:solidFill>
+                  <a:schemeClr val="bg1"/>
+                </a:solidFill>
+                <a:latin typeface="Avenir Medium" panose="02000503020000020003" pitchFamily="2" charset="0"/>
+                <a:ea typeface="Bodoni Ornaments" pitchFamily="2" charset="0"/>
+              </a:rPr>
+              <a:t>He welcomes the weakest, the vilest, the poor</a:t>
+            </a:r>
+          </a:p>
+          <a:p>
+            <a:pPr algn="l"/>
+            <a:r>
+              <a:rPr lang="en-US" sz="3600" dirty="0">
+                <a:solidFill>
+                  <a:srgbClr val="FFFF00"/>
+                </a:solidFill>
+                <a:latin typeface="Avenir Medium" panose="02000503020000020003" pitchFamily="2" charset="0"/>
+                <a:ea typeface="Bodoni Ornaments" pitchFamily="2" charset="0"/>
+              </a:rPr>
+              <a:t>       C                   G              D           G</a:t>
+            </a:r>
+          </a:p>
+          <a:p>
+            <a:pPr algn="l"/>
+            <a:r>
+              <a:rPr lang="en-US" sz="3600" dirty="0">
+                <a:solidFill>
+                  <a:schemeClr val="bg1"/>
+                </a:solidFill>
+                <a:latin typeface="Avenir Medium" panose="02000503020000020003" pitchFamily="2" charset="0"/>
+                <a:ea typeface="Bodoni Ornaments" pitchFamily="2" charset="0"/>
+              </a:rPr>
+              <a:t>Our sins they are many, His mercy is more</a:t>
+            </a:r>
+          </a:p>
+          <a:p>
+            <a:pPr algn="l"/>
+            <a:endParaRPr lang="en-US" sz="3600" dirty="0">
               <a:solidFill>
                 <a:schemeClr val="bg1"/>
               </a:solidFill>
@@ -5617,19 +4702,8 @@
             </a:endParaRPr>
           </a:p>
           <a:p>
-            <a:r>
-              <a:rPr lang="en-US" sz="4400" dirty="0">
-                <a:solidFill>
-                  <a:schemeClr val="bg1"/>
-                </a:solidFill>
-                <a:latin typeface="Avenir Medium" panose="02000503020000020003" pitchFamily="2" charset="0"/>
-                <a:ea typeface="Bodoni Ornaments" pitchFamily="2" charset="0"/>
-              </a:rPr>
-              <a:t>constantly roam</a:t>
-            </a:r>
-          </a:p>
-          <a:p>
-            <a:endParaRPr lang="en-US" sz="4400" dirty="0">
+            <a:pPr algn="l"/>
+            <a:endParaRPr lang="en-US" sz="3600" dirty="0">
               <a:solidFill>
                 <a:schemeClr val="bg1"/>
               </a:solidFill>
@@ -5638,19 +4712,8 @@
             </a:endParaRPr>
           </a:p>
           <a:p>
-            <a:r>
-              <a:rPr lang="en-US" sz="4400" dirty="0">
-                <a:solidFill>
-                  <a:schemeClr val="bg1"/>
-                </a:solidFill>
-                <a:latin typeface="Avenir Medium" panose="02000503020000020003" pitchFamily="2" charset="0"/>
-                <a:ea typeface="Bodoni Ornaments" pitchFamily="2" charset="0"/>
-              </a:rPr>
-              <a:t>What Father so tender </a:t>
-            </a:r>
-          </a:p>
-          <a:p>
-            <a:endParaRPr lang="en-US" sz="4400" dirty="0">
+            <a:pPr algn="l"/>
+            <a:endParaRPr lang="en-US" sz="3600" dirty="0">
               <a:solidFill>
                 <a:schemeClr val="bg1"/>
               </a:solidFill>
@@ -5659,16 +4722,54 @@
             </a:endParaRPr>
           </a:p>
           <a:p>
-            <a:r>
-              <a:rPr lang="en-US" sz="4400" dirty="0">
-                <a:solidFill>
-                  <a:schemeClr val="bg1"/>
-                </a:solidFill>
-                <a:latin typeface="Avenir Medium" panose="02000503020000020003" pitchFamily="2" charset="0"/>
-                <a:ea typeface="Bodoni Ornaments" pitchFamily="2" charset="0"/>
-              </a:rPr>
-              <a:t>is calling us home</a:t>
-            </a:r>
+            <a:pPr algn="l"/>
+            <a:endParaRPr lang="en-US" sz="3600" dirty="0">
+              <a:solidFill>
+                <a:schemeClr val="bg1"/>
+              </a:solidFill>
+              <a:latin typeface="Avenir Medium" panose="02000503020000020003" pitchFamily="2" charset="0"/>
+              <a:ea typeface="Bodoni Ornaments" pitchFamily="2" charset="0"/>
+            </a:endParaRPr>
+          </a:p>
+          <a:p>
+            <a:pPr algn="l"/>
+            <a:endParaRPr lang="en-US" sz="3600" dirty="0">
+              <a:solidFill>
+                <a:schemeClr val="bg1"/>
+              </a:solidFill>
+              <a:latin typeface="Avenir Medium" panose="02000503020000020003" pitchFamily="2" charset="0"/>
+              <a:ea typeface="Bodoni Ornaments" pitchFamily="2" charset="0"/>
+            </a:endParaRPr>
+          </a:p>
+          <a:p>
+            <a:pPr algn="l"/>
+            <a:endParaRPr lang="en-US" sz="3600" dirty="0">
+              <a:solidFill>
+                <a:schemeClr val="bg1"/>
+              </a:solidFill>
+              <a:latin typeface="Avenir Medium" panose="02000503020000020003" pitchFamily="2" charset="0"/>
+              <a:ea typeface="Bodoni Ornaments" pitchFamily="2" charset="0"/>
+            </a:endParaRPr>
+          </a:p>
+          <a:p>
+            <a:pPr algn="l"/>
+            <a:endParaRPr lang="en-US" sz="3600" dirty="0">
+              <a:solidFill>
+                <a:schemeClr val="bg1"/>
+              </a:solidFill>
+              <a:latin typeface="Avenir Medium" panose="02000503020000020003" pitchFamily="2" charset="0"/>
+              <a:ea typeface="Bodoni Ornaments" pitchFamily="2" charset="0"/>
+            </a:endParaRPr>
+          </a:p>
+          <a:p>
+            <a:pPr algn="l"/>
+            <a:endParaRPr lang="en-US" sz="3600" dirty="0">
+              <a:solidFill>
+                <a:schemeClr val="bg1"/>
+              </a:solidFill>
+              <a:latin typeface="Avenir Medium" panose="02000503020000020003" pitchFamily="2" charset="0"/>
+              <a:ea typeface="Bodoni Ornaments" pitchFamily="2" charset="0"/>
+            </a:endParaRPr>
           </a:p>
         </p:txBody>
       </p:sp>
@@ -5676,6 +4777,410 @@
     <p:extLst>
       <p:ext uri="{BB962C8B-B14F-4D97-AF65-F5344CB8AC3E}">
         <p14:creationId xmlns:p14="http://schemas.microsoft.com/office/powerpoint/2010/main" val="3536714320"/>
+      </p:ext>
+    </p:extLst>
+  </p:cSld>
+  <p:clrMapOvr>
+    <a:masterClrMapping/>
+  </p:clrMapOvr>
+</p:sld>
+</file>
+
+<file path=ppt/slides/slide7.xml><?xml version="1.0" encoding="utf-8"?>
+<p:sld xmlns:a="http://schemas.openxmlformats.org/drawingml/2006/main" xmlns:r="http://schemas.openxmlformats.org/officeDocument/2006/relationships" xmlns:p="http://schemas.openxmlformats.org/presentationml/2006/main">
+  <p:cSld>
+    <p:bg>
+      <p:bgPr>
+        <a:solidFill>
+          <a:srgbClr val="7030A0"/>
+        </a:solidFill>
+        <a:effectLst/>
+      </p:bgPr>
+    </p:bg>
+    <p:spTree>
+      <p:nvGrpSpPr>
+        <p:cNvPr id="1" name="">
+          <a:extLst>
+            <a:ext uri="{FF2B5EF4-FFF2-40B4-BE49-F238E27FC236}">
+              <a16:creationId xmlns:a16="http://schemas.microsoft.com/office/drawing/2014/main" id="{389D6EC4-127F-BFAD-171D-73A78D973445}"/>
+            </a:ext>
+          </a:extLst>
+        </p:cNvPr>
+        <p:cNvGrpSpPr/>
+        <p:nvPr/>
+      </p:nvGrpSpPr>
+      <p:grpSpPr>
+        <a:xfrm>
+          <a:off x="0" y="0"/>
+          <a:ext cx="0" cy="0"/>
+          <a:chOff x="0" y="0"/>
+          <a:chExt cx="0" cy="0"/>
+        </a:xfrm>
+      </p:grpSpPr>
+      <p:sp>
+        <p:nvSpPr>
+          <p:cNvPr id="3" name="Subtitle 2">
+            <a:extLst>
+              <a:ext uri="{FF2B5EF4-FFF2-40B4-BE49-F238E27FC236}">
+                <a16:creationId xmlns:a16="http://schemas.microsoft.com/office/drawing/2014/main" id="{7F895BFC-B06A-5412-BD85-37FF4AC91E60}"/>
+              </a:ext>
+            </a:extLst>
+          </p:cNvPr>
+          <p:cNvSpPr>
+            <a:spLocks noGrp="1"/>
+          </p:cNvSpPr>
+          <p:nvPr>
+            <p:ph type="subTitle" idx="1"/>
+          </p:nvPr>
+        </p:nvSpPr>
+        <p:spPr>
+          <a:xfrm>
+            <a:off x="682831" y="212035"/>
+            <a:ext cx="10826338" cy="6374295"/>
+          </a:xfrm>
+        </p:spPr>
+        <p:txBody>
+          <a:bodyPr>
+            <a:noAutofit/>
+          </a:bodyPr>
+          <a:lstStyle/>
+          <a:p>
+            <a:pPr algn="l"/>
+            <a:endParaRPr lang="en-US" sz="3600" dirty="0">
+              <a:solidFill>
+                <a:schemeClr val="bg1"/>
+              </a:solidFill>
+              <a:latin typeface="Avenir Medium" panose="02000503020000020003" pitchFamily="2" charset="0"/>
+              <a:ea typeface="Bodoni Ornaments" pitchFamily="2" charset="0"/>
+            </a:endParaRPr>
+          </a:p>
+          <a:p>
+            <a:pPr algn="l"/>
+            <a:endParaRPr lang="en-US" sz="3600" dirty="0">
+              <a:solidFill>
+                <a:schemeClr val="bg1"/>
+              </a:solidFill>
+              <a:latin typeface="Avenir Medium" panose="02000503020000020003" pitchFamily="2" charset="0"/>
+              <a:ea typeface="Bodoni Ornaments" pitchFamily="2" charset="0"/>
+            </a:endParaRPr>
+          </a:p>
+          <a:p>
+            <a:pPr algn="l"/>
+            <a:r>
+              <a:rPr lang="en-US" sz="3600" dirty="0">
+                <a:solidFill>
+                  <a:srgbClr val="FFFF00"/>
+                </a:solidFill>
+                <a:latin typeface="Avenir Medium" panose="02000503020000020003" pitchFamily="2" charset="0"/>
+                <a:ea typeface="Bodoni Ornaments" pitchFamily="2" charset="0"/>
+              </a:rPr>
+              <a:t>G               C G Em         D           C G Em</a:t>
+            </a:r>
+          </a:p>
+          <a:p>
+            <a:pPr algn="l"/>
+            <a:r>
+              <a:rPr lang="en-US" sz="3600" dirty="0">
+                <a:solidFill>
+                  <a:schemeClr val="bg1"/>
+                </a:solidFill>
+                <a:latin typeface="Avenir Medium" panose="02000503020000020003" pitchFamily="2" charset="0"/>
+                <a:ea typeface="Bodoni Ornaments" pitchFamily="2" charset="0"/>
+              </a:rPr>
+              <a:t>Praise the Lord,       His mercy is more</a:t>
+            </a:r>
+            <a:br>
+              <a:rPr lang="en-US" sz="3600" dirty="0">
+                <a:solidFill>
+                  <a:schemeClr val="bg1"/>
+                </a:solidFill>
+                <a:latin typeface="Avenir Medium" panose="02000503020000020003" pitchFamily="2" charset="0"/>
+                <a:ea typeface="Bodoni Ornaments" pitchFamily="2" charset="0"/>
+              </a:rPr>
+            </a:br>
+            <a:r>
+              <a:rPr lang="en-US" sz="3600" dirty="0">
+                <a:solidFill>
+                  <a:srgbClr val="FFFF00"/>
+                </a:solidFill>
+                <a:latin typeface="Avenir Medium" panose="02000503020000020003" pitchFamily="2" charset="0"/>
+                <a:ea typeface="Bodoni Ornaments" pitchFamily="2" charset="0"/>
+              </a:rPr>
+              <a:t>C                     D                D             Em</a:t>
+            </a:r>
+          </a:p>
+          <a:p>
+            <a:pPr algn="l"/>
+            <a:r>
+              <a:rPr lang="en-US" sz="3600" dirty="0">
+                <a:solidFill>
+                  <a:schemeClr val="bg1"/>
+                </a:solidFill>
+                <a:latin typeface="Avenir Medium" panose="02000503020000020003" pitchFamily="2" charset="0"/>
+                <a:ea typeface="Bodoni Ornaments" pitchFamily="2" charset="0"/>
+              </a:rPr>
+              <a:t>Stronger than darkness, new every morn</a:t>
+            </a:r>
+          </a:p>
+          <a:p>
+            <a:pPr algn="l"/>
+            <a:r>
+              <a:rPr lang="en-US" sz="3600" dirty="0">
+                <a:solidFill>
+                  <a:srgbClr val="FFFF00"/>
+                </a:solidFill>
+                <a:latin typeface="Avenir Medium" panose="02000503020000020003" pitchFamily="2" charset="0"/>
+                <a:ea typeface="Bodoni Ornaments" pitchFamily="2" charset="0"/>
+              </a:rPr>
+              <a:t>C                   G                      D              G</a:t>
+            </a:r>
+          </a:p>
+          <a:p>
+            <a:pPr algn="l"/>
+            <a:r>
+              <a:rPr lang="en-US" sz="3600" dirty="0">
+                <a:solidFill>
+                  <a:schemeClr val="bg1"/>
+                </a:solidFill>
+                <a:latin typeface="Avenir Medium" panose="02000503020000020003" pitchFamily="2" charset="0"/>
+                <a:ea typeface="Bodoni Ornaments" pitchFamily="2" charset="0"/>
+              </a:rPr>
+              <a:t>Our sins they are many, His mercy is more</a:t>
+            </a:r>
+          </a:p>
+          <a:p>
+            <a:pPr algn="l"/>
+            <a:endParaRPr lang="en-US" sz="3600" dirty="0">
+              <a:solidFill>
+                <a:schemeClr val="bg1"/>
+              </a:solidFill>
+              <a:latin typeface="Avenir Medium" panose="02000503020000020003" pitchFamily="2" charset="0"/>
+              <a:ea typeface="Bodoni Ornaments" pitchFamily="2" charset="0"/>
+            </a:endParaRPr>
+          </a:p>
+          <a:p>
+            <a:pPr algn="l"/>
+            <a:endParaRPr lang="en-US" sz="3600" dirty="0">
+              <a:solidFill>
+                <a:schemeClr val="bg1"/>
+              </a:solidFill>
+              <a:latin typeface="Avenir Medium" panose="02000503020000020003" pitchFamily="2" charset="0"/>
+              <a:ea typeface="Bodoni Ornaments" pitchFamily="2" charset="0"/>
+            </a:endParaRPr>
+          </a:p>
+        </p:txBody>
+      </p:sp>
+    </p:spTree>
+    <p:extLst>
+      <p:ext uri="{BB962C8B-B14F-4D97-AF65-F5344CB8AC3E}">
+        <p14:creationId xmlns:p14="http://schemas.microsoft.com/office/powerpoint/2010/main" val="156866920"/>
+      </p:ext>
+    </p:extLst>
+  </p:cSld>
+  <p:clrMapOvr>
+    <a:masterClrMapping/>
+  </p:clrMapOvr>
+</p:sld>
+</file>
+
+<file path=ppt/slides/slide8.xml><?xml version="1.0" encoding="utf-8"?>
+<p:sld xmlns:a="http://schemas.openxmlformats.org/drawingml/2006/main" xmlns:r="http://schemas.openxmlformats.org/officeDocument/2006/relationships" xmlns:p="http://schemas.openxmlformats.org/presentationml/2006/main">
+  <p:cSld>
+    <p:bg>
+      <p:bgPr>
+        <a:solidFill>
+          <a:schemeClr val="accent1"/>
+        </a:solidFill>
+        <a:effectLst/>
+      </p:bgPr>
+    </p:bg>
+    <p:spTree>
+      <p:nvGrpSpPr>
+        <p:cNvPr id="1" name="">
+          <a:extLst>
+            <a:ext uri="{FF2B5EF4-FFF2-40B4-BE49-F238E27FC236}">
+              <a16:creationId xmlns:a16="http://schemas.microsoft.com/office/drawing/2014/main" id="{8DB28804-0296-2F6C-62C2-18A0239C9107}"/>
+            </a:ext>
+          </a:extLst>
+        </p:cNvPr>
+        <p:cNvGrpSpPr/>
+        <p:nvPr/>
+      </p:nvGrpSpPr>
+      <p:grpSpPr>
+        <a:xfrm>
+          <a:off x="0" y="0"/>
+          <a:ext cx="0" cy="0"/>
+          <a:chOff x="0" y="0"/>
+          <a:chExt cx="0" cy="0"/>
+        </a:xfrm>
+      </p:grpSpPr>
+      <p:sp>
+        <p:nvSpPr>
+          <p:cNvPr id="3" name="Subtitle 2">
+            <a:extLst>
+              <a:ext uri="{FF2B5EF4-FFF2-40B4-BE49-F238E27FC236}">
+                <a16:creationId xmlns:a16="http://schemas.microsoft.com/office/drawing/2014/main" id="{5813D3C6-E285-880B-ACB9-52B26040EE65}"/>
+              </a:ext>
+            </a:extLst>
+          </p:cNvPr>
+          <p:cNvSpPr>
+            <a:spLocks noGrp="1"/>
+          </p:cNvSpPr>
+          <p:nvPr>
+            <p:ph type="subTitle" idx="1"/>
+          </p:nvPr>
+        </p:nvSpPr>
+        <p:spPr>
+          <a:xfrm>
+            <a:off x="682831" y="238539"/>
+            <a:ext cx="10826338" cy="6281531"/>
+          </a:xfrm>
+        </p:spPr>
+        <p:txBody>
+          <a:bodyPr>
+            <a:noAutofit/>
+          </a:bodyPr>
+          <a:lstStyle/>
+          <a:p>
+            <a:pPr algn="l"/>
+            <a:endParaRPr lang="en-US" sz="3600" dirty="0">
+              <a:solidFill>
+                <a:schemeClr val="bg1"/>
+              </a:solidFill>
+              <a:latin typeface="Avenir Medium" panose="02000503020000020003" pitchFamily="2" charset="0"/>
+              <a:ea typeface="Bodoni Ornaments" pitchFamily="2" charset="0"/>
+            </a:endParaRPr>
+          </a:p>
+          <a:p>
+            <a:pPr algn="l"/>
+            <a:r>
+              <a:rPr lang="en-US" sz="3600" dirty="0">
+                <a:solidFill>
+                  <a:srgbClr val="FFFF00"/>
+                </a:solidFill>
+                <a:latin typeface="Avenir Medium" panose="02000503020000020003" pitchFamily="2" charset="0"/>
+                <a:ea typeface="Bodoni Ornaments" pitchFamily="2" charset="0"/>
+              </a:rPr>
+              <a:t>         G                                 C                 G</a:t>
+            </a:r>
+          </a:p>
+          <a:p>
+            <a:pPr algn="l"/>
+            <a:r>
+              <a:rPr lang="en-US" sz="3600" dirty="0">
+                <a:solidFill>
+                  <a:schemeClr val="bg1"/>
+                </a:solidFill>
+                <a:latin typeface="Avenir Medium" panose="02000503020000020003" pitchFamily="2" charset="0"/>
+                <a:ea typeface="Bodoni Ornaments" pitchFamily="2" charset="0"/>
+              </a:rPr>
+              <a:t>What riches of kindness He lavished on us</a:t>
+            </a:r>
+          </a:p>
+          <a:p>
+            <a:pPr algn="l"/>
+            <a:r>
+              <a:rPr lang="en-US" sz="3600" dirty="0">
+                <a:solidFill>
+                  <a:srgbClr val="FFFF00"/>
+                </a:solidFill>
+                <a:latin typeface="Avenir Medium" panose="02000503020000020003" pitchFamily="2" charset="0"/>
+                <a:ea typeface="Bodoni Ornaments" pitchFamily="2" charset="0"/>
+              </a:rPr>
+              <a:t>      D                      Em                 C                 D</a:t>
+            </a:r>
+          </a:p>
+          <a:p>
+            <a:pPr algn="l"/>
+            <a:r>
+              <a:rPr lang="en-US" sz="3600" dirty="0">
+                <a:solidFill>
+                  <a:schemeClr val="bg1"/>
+                </a:solidFill>
+                <a:latin typeface="Avenir Medium" panose="02000503020000020003" pitchFamily="2" charset="0"/>
+                <a:ea typeface="Bodoni Ornaments" pitchFamily="2" charset="0"/>
+              </a:rPr>
+              <a:t>His blood was the payment, His life was the cost</a:t>
+            </a:r>
+          </a:p>
+          <a:p>
+            <a:pPr algn="l"/>
+            <a:r>
+              <a:rPr lang="en-US" sz="3600" dirty="0">
+                <a:solidFill>
+                  <a:srgbClr val="FFFF00"/>
+                </a:solidFill>
+                <a:latin typeface="Avenir Medium" panose="02000503020000020003" pitchFamily="2" charset="0"/>
+                <a:ea typeface="Bodoni Ornaments" pitchFamily="2" charset="0"/>
+              </a:rPr>
+              <a:t>      G                     Am                    G       C</a:t>
+            </a:r>
+          </a:p>
+          <a:p>
+            <a:pPr algn="l"/>
+            <a:r>
+              <a:rPr lang="en-US" sz="3600" dirty="0">
+                <a:solidFill>
+                  <a:schemeClr val="bg1"/>
+                </a:solidFill>
+                <a:latin typeface="Avenir Medium" panose="02000503020000020003" pitchFamily="2" charset="0"/>
+                <a:ea typeface="Bodoni Ornaments" pitchFamily="2" charset="0"/>
+              </a:rPr>
+              <a:t>We stood 'neath a debt we could never afford</a:t>
+            </a:r>
+          </a:p>
+          <a:p>
+            <a:pPr algn="l"/>
+            <a:r>
+              <a:rPr lang="en-US" sz="3600" dirty="0">
+                <a:solidFill>
+                  <a:srgbClr val="FFFF00"/>
+                </a:solidFill>
+                <a:latin typeface="Avenir Medium" panose="02000503020000020003" pitchFamily="2" charset="0"/>
+                <a:ea typeface="Bodoni Ornaments" pitchFamily="2" charset="0"/>
+              </a:rPr>
+              <a:t>       C                   G              D              G</a:t>
+            </a:r>
+          </a:p>
+          <a:p>
+            <a:pPr algn="l"/>
+            <a:r>
+              <a:rPr lang="en-US" sz="3600" dirty="0">
+                <a:solidFill>
+                  <a:schemeClr val="bg1"/>
+                </a:solidFill>
+                <a:latin typeface="Avenir Medium" panose="02000503020000020003" pitchFamily="2" charset="0"/>
+                <a:ea typeface="Bodoni Ornaments" pitchFamily="2" charset="0"/>
+              </a:rPr>
+              <a:t>Our sins they are many, His mercy is more</a:t>
+            </a:r>
+          </a:p>
+          <a:p>
+            <a:pPr algn="l"/>
+            <a:endParaRPr lang="en-US" sz="3600" dirty="0">
+              <a:solidFill>
+                <a:schemeClr val="bg1"/>
+              </a:solidFill>
+              <a:latin typeface="Avenir Medium" panose="02000503020000020003" pitchFamily="2" charset="0"/>
+              <a:ea typeface="Bodoni Ornaments" pitchFamily="2" charset="0"/>
+            </a:endParaRPr>
+          </a:p>
+          <a:p>
+            <a:pPr algn="l"/>
+            <a:endParaRPr lang="en-US" sz="3600" dirty="0">
+              <a:solidFill>
+                <a:schemeClr val="bg1"/>
+              </a:solidFill>
+              <a:latin typeface="Avenir Medium" panose="02000503020000020003" pitchFamily="2" charset="0"/>
+              <a:ea typeface="Bodoni Ornaments" pitchFamily="2" charset="0"/>
+            </a:endParaRPr>
+          </a:p>
+        </p:txBody>
+      </p:sp>
+    </p:spTree>
+    <p:extLst>
+      <p:ext uri="{BB962C8B-B14F-4D97-AF65-F5344CB8AC3E}">
+        <p14:creationId xmlns:p14="http://schemas.microsoft.com/office/powerpoint/2010/main" val="1157592653"/>
       </p:ext>
     </p:extLst>
   </p:cSld>
@@ -5691,7 +5196,7 @@
     <p:bg>
       <p:bgPr>
         <a:solidFill>
-          <a:schemeClr val="accent1"/>
+          <a:srgbClr val="7030A0"/>
         </a:solidFill>
         <a:effectLst/>
       </p:bgPr>
@@ -5701,7 +5206,7 @@
         <p:cNvPr id="1" name="">
           <a:extLst>
             <a:ext uri="{FF2B5EF4-FFF2-40B4-BE49-F238E27FC236}">
-              <a16:creationId xmlns:a16="http://schemas.microsoft.com/office/drawing/2014/main" id="{4AB9699A-1C08-9EFB-9CF2-08D5FBAFF29C}"/>
+              <a16:creationId xmlns:a16="http://schemas.microsoft.com/office/drawing/2014/main" id="{DCE8561D-D38F-AAED-281E-4CAA898A3903}"/>
             </a:ext>
           </a:extLst>
         </p:cNvPr>
@@ -5721,7 +5226,7 @@
           <p:cNvPr id="3" name="Subtitle 2">
             <a:extLst>
               <a:ext uri="{FF2B5EF4-FFF2-40B4-BE49-F238E27FC236}">
-                <a16:creationId xmlns:a16="http://schemas.microsoft.com/office/drawing/2014/main" id="{4357661B-3091-0E01-24FD-4DA1D80815B0}"/>
+                <a16:creationId xmlns:a16="http://schemas.microsoft.com/office/drawing/2014/main" id="{2F420DD9-55EA-305F-9529-24AA5F3A272A}"/>
               </a:ext>
             </a:extLst>
           </p:cNvPr>
@@ -5734,8 +5239,8 @@
         </p:nvSpPr>
         <p:spPr>
           <a:xfrm>
-            <a:off x="682831" y="497702"/>
-            <a:ext cx="10826338" cy="5862596"/>
+            <a:off x="682831" y="212035"/>
+            <a:ext cx="9282804" cy="6374295"/>
           </a:xfrm>
         </p:spPr>
         <p:txBody>
@@ -5744,7 +5249,8 @@
           </a:bodyPr>
           <a:lstStyle/>
           <a:p>
-            <a:endParaRPr lang="en-US" sz="4400" dirty="0">
+            <a:pPr algn="l"/>
+            <a:endParaRPr lang="en-US" sz="3600" dirty="0">
               <a:solidFill>
                 <a:schemeClr val="bg1"/>
               </a:solidFill>
@@ -5753,19 +5259,8 @@
             </a:endParaRPr>
           </a:p>
           <a:p>
-            <a:r>
-              <a:rPr lang="en-US" sz="4400" dirty="0">
-                <a:solidFill>
-                  <a:schemeClr val="bg1"/>
-                </a:solidFill>
-                <a:latin typeface="Avenir Medium" panose="02000503020000020003" pitchFamily="2" charset="0"/>
-                <a:ea typeface="Bodoni Ornaments" pitchFamily="2" charset="0"/>
-              </a:rPr>
-              <a:t>He welcomes the weakest, </a:t>
-            </a:r>
-          </a:p>
-          <a:p>
-            <a:endParaRPr lang="en-US" sz="4400" dirty="0">
+            <a:pPr algn="l"/>
+            <a:endParaRPr lang="en-US" sz="3600" dirty="0">
               <a:solidFill>
                 <a:schemeClr val="bg1"/>
               </a:solidFill>
@@ -5774,19 +5269,92 @@
             </a:endParaRPr>
           </a:p>
           <a:p>
-            <a:r>
-              <a:rPr lang="en-US" sz="4400" dirty="0">
+            <a:pPr algn="l"/>
+            <a:r>
+              <a:rPr lang="en-US" sz="3600" dirty="0">
+                <a:solidFill>
+                  <a:srgbClr val="FFFF00"/>
+                </a:solidFill>
+                <a:latin typeface="Avenir Medium" panose="02000503020000020003" pitchFamily="2" charset="0"/>
+                <a:ea typeface="Bodoni Ornaments" pitchFamily="2" charset="0"/>
+              </a:rPr>
+              <a:t>G               C G Em         D           C G Em</a:t>
+            </a:r>
+          </a:p>
+          <a:p>
+            <a:pPr algn="l"/>
+            <a:r>
+              <a:rPr lang="en-US" sz="3600" dirty="0">
                 <a:solidFill>
                   <a:schemeClr val="bg1"/>
                 </a:solidFill>
                 <a:latin typeface="Avenir Medium" panose="02000503020000020003" pitchFamily="2" charset="0"/>
                 <a:ea typeface="Bodoni Ornaments" pitchFamily="2" charset="0"/>
               </a:rPr>
-              <a:t>the vilest, the poor</a:t>
-            </a:r>
-          </a:p>
-          <a:p>
-            <a:endParaRPr lang="en-US" sz="4400" dirty="0">
+              <a:t>Praise the Lord,       His mercy is more</a:t>
+            </a:r>
+            <a:br>
+              <a:rPr lang="en-US" sz="3600" dirty="0">
+                <a:solidFill>
+                  <a:schemeClr val="bg1"/>
+                </a:solidFill>
+                <a:latin typeface="Avenir Medium" panose="02000503020000020003" pitchFamily="2" charset="0"/>
+                <a:ea typeface="Bodoni Ornaments" pitchFamily="2" charset="0"/>
+              </a:rPr>
+            </a:br>
+            <a:r>
+              <a:rPr lang="en-US" sz="3600" dirty="0">
+                <a:solidFill>
+                  <a:srgbClr val="FFFF00"/>
+                </a:solidFill>
+                <a:latin typeface="Avenir Medium" panose="02000503020000020003" pitchFamily="2" charset="0"/>
+                <a:ea typeface="Bodoni Ornaments" pitchFamily="2" charset="0"/>
+              </a:rPr>
+              <a:t>C                     D                D             Em</a:t>
+            </a:r>
+          </a:p>
+          <a:p>
+            <a:pPr algn="l"/>
+            <a:r>
+              <a:rPr lang="en-US" sz="3600" dirty="0">
+                <a:solidFill>
+                  <a:schemeClr val="bg1"/>
+                </a:solidFill>
+                <a:latin typeface="Avenir Medium" panose="02000503020000020003" pitchFamily="2" charset="0"/>
+                <a:ea typeface="Bodoni Ornaments" pitchFamily="2" charset="0"/>
+              </a:rPr>
+              <a:t>Stronger than darkness, new every morn</a:t>
+            </a:r>
+          </a:p>
+          <a:p>
+            <a:pPr algn="l"/>
+            <a:r>
+              <a:rPr lang="en-US" sz="3600" dirty="0">
+                <a:solidFill>
+                  <a:srgbClr val="FFFF00"/>
+                </a:solidFill>
+                <a:latin typeface="Avenir Medium" panose="02000503020000020003" pitchFamily="2" charset="0"/>
+                <a:ea typeface="Bodoni Ornaments" pitchFamily="2" charset="0"/>
+              </a:rPr>
+              <a:t>C                   G                      D              G</a:t>
+            </a:r>
+          </a:p>
+          <a:p>
+            <a:pPr algn="l"/>
+            <a:r>
+              <a:rPr lang="en-US" sz="3600" dirty="0">
+                <a:solidFill>
+                  <a:schemeClr val="bg1"/>
+                </a:solidFill>
+                <a:latin typeface="Avenir Medium" panose="02000503020000020003" pitchFamily="2" charset="0"/>
+                <a:ea typeface="Bodoni Ornaments" pitchFamily="2" charset="0"/>
+              </a:rPr>
+              <a:t>Our sins they are many, His mercy is more</a:t>
+            </a:r>
+          </a:p>
+          <a:p>
+            <a:pPr algn="l"/>
+            <a:endParaRPr lang="en-US" sz="3600" dirty="0">
               <a:solidFill>
                 <a:schemeClr val="bg1"/>
               </a:solidFill>
@@ -5795,19 +5363,8 @@
             </a:endParaRPr>
           </a:p>
           <a:p>
-            <a:r>
-              <a:rPr lang="en-US" sz="4400" dirty="0">
-                <a:solidFill>
-                  <a:schemeClr val="bg1"/>
-                </a:solidFill>
-                <a:latin typeface="Avenir Medium" panose="02000503020000020003" pitchFamily="2" charset="0"/>
-                <a:ea typeface="Bodoni Ornaments" pitchFamily="2" charset="0"/>
-              </a:rPr>
-              <a:t>Our sins they are many, </a:t>
-            </a:r>
-          </a:p>
-          <a:p>
-            <a:endParaRPr lang="en-US" sz="4400" dirty="0">
+            <a:pPr algn="l"/>
+            <a:endParaRPr lang="en-US" sz="3600" dirty="0">
               <a:solidFill>
                 <a:schemeClr val="bg1"/>
               </a:solidFill>
@@ -5815,16 +5372,43 @@
               <a:ea typeface="Bodoni Ornaments" pitchFamily="2" charset="0"/>
             </a:endParaRPr>
           </a:p>
-          <a:p>
-            <a:r>
-              <a:rPr lang="en-US" sz="4400" dirty="0">
+        </p:txBody>
+      </p:sp>
+      <p:sp>
+        <p:nvSpPr>
+          <p:cNvPr id="2" name="TextBox 1">
+            <a:extLst>
+              <a:ext uri="{FF2B5EF4-FFF2-40B4-BE49-F238E27FC236}">
+                <a16:creationId xmlns:a16="http://schemas.microsoft.com/office/drawing/2014/main" id="{9D349009-25DD-C3B8-FE0C-5438A813F1BC}"/>
+              </a:ext>
+            </a:extLst>
+          </p:cNvPr>
+          <p:cNvSpPr txBox="1"/>
+          <p:nvPr/>
+        </p:nvSpPr>
+        <p:spPr>
+          <a:xfrm>
+            <a:off x="8980736" y="6211669"/>
+            <a:ext cx="3211264" cy="646331"/>
+          </a:xfrm>
+          <a:prstGeom prst="rect">
+            <a:avLst/>
+          </a:prstGeom>
+          <a:noFill/>
+        </p:spPr>
+        <p:txBody>
+          <a:bodyPr wrap="none" rtlCol="0">
+            <a:spAutoFit/>
+          </a:bodyPr>
+          <a:lstStyle/>
+          <a:p>
+            <a:r>
+              <a:rPr lang="en-US" sz="3600" b="1" dirty="0">
                 <a:solidFill>
                   <a:schemeClr val="bg1"/>
                 </a:solidFill>
-                <a:latin typeface="Avenir Medium" panose="02000503020000020003" pitchFamily="2" charset="0"/>
-                <a:ea typeface="Bodoni Ornaments" pitchFamily="2" charset="0"/>
-              </a:rPr>
-              <a:t>His mercy is more</a:t>
+              </a:rPr>
+              <a:t>REPEAT &amp; END</a:t>
             </a:r>
           </a:p>
         </p:txBody>
@@ -5832,7 +5416,7 @@
     </p:spTree>
     <p:extLst>
       <p:ext uri="{BB962C8B-B14F-4D97-AF65-F5344CB8AC3E}">
-        <p14:creationId xmlns:p14="http://schemas.microsoft.com/office/powerpoint/2010/main" val="1992958983"/>
+        <p14:creationId xmlns:p14="http://schemas.microsoft.com/office/powerpoint/2010/main" val="4127363614"/>
       </p:ext>
     </p:extLst>
   </p:cSld>
